--- a/urok22/Урок22_презентация.pptx
+++ b/urok22/Урок22_презентация.pptx
@@ -10,9 +10,11 @@
     <p:sldId id="258" r:id="rId4"/>
     <p:sldId id="259" r:id="rId5"/>
     <p:sldId id="260" r:id="rId6"/>
+    <p:sldId id="261" r:id="rId7"/>
+    <p:sldId id="262" r:id="rId8"/>
   </p:sldIdLst>
   <p:notesMasterIdLst>
-    <p:notesMasterId r:id="rId7"/>
+    <p:notesMasterId r:id="rId9"/>
   </p:notesMasterIdLst>
   <p:sldSz cx="12191695" cy="6858000"/>
   <p:notesSz cx="6858000" cy="12191695"/>
@@ -882,6 +884,182 @@
             <a:fld id="{F7021451-1387-4CA6-816F-3879F97B5CBC}" type="slidenum">
               <a:rPr lang="en-US"/>
               <a:t>5</a:t>
+            </a:fld>
+            <a:endParaRPr lang="en-US"/>
+          </a:p>
+        </p:txBody>
+      </p:sp>
+    </p:spTree>
+    <p:extLst>
+      <p:ext uri="{BB962C8B-B14F-4D97-AF65-F5344CB8AC3E}">
+        <p14:creationId xmlns:p14="http://schemas.microsoft.com/office/powerpoint/2010/main" val="1024086991"/>
+      </p:ext>
+    </p:extLst>
+  </p:cSld>
+  <p:clrMapOvr>
+    <a:masterClrMapping/>
+  </p:clrMapOvr>
+</p:notes>
+</file>
+
+<file path=ppt/notesSlides/notesSlide6.xml><?xml version="1.0" encoding="utf-8"?>
+<p:notes xmlns:a="http://schemas.openxmlformats.org/drawingml/2006/main" xmlns:r="http://schemas.openxmlformats.org/officeDocument/2006/relationships" xmlns:p="http://schemas.openxmlformats.org/presentationml/2006/main">
+  <p:cSld>
+    <p:spTree>
+      <p:nvGrpSpPr>
+        <p:cNvPr id="1" name=""/>
+        <p:cNvGrpSpPr/>
+        <p:nvPr/>
+      </p:nvGrpSpPr>
+      <p:grpSpPr>
+        <a:xfrm>
+          <a:off x="0" y="0"/>
+          <a:ext cx="0" cy="0"/>
+          <a:chOff x="0" y="0"/>
+          <a:chExt cx="0" cy="0"/>
+        </a:xfrm>
+      </p:grpSpPr>
+      <p:sp>
+        <p:nvSpPr>
+          <p:cNvPr id="2" name="Slide Image Placeholder 1"/>
+          <p:cNvSpPr>
+            <a:spLocks noGrp="1" noRot="1" noChangeAspect="1"/>
+          </p:cNvSpPr>
+          <p:nvPr>
+            <p:ph type="sldImg"/>
+          </p:nvPr>
+        </p:nvSpPr>
+        <p:spPr/>
+      </p:sp>
+      <p:sp>
+        <p:nvSpPr>
+          <p:cNvPr id="3" name="Notes Placeholder 2"/>
+          <p:cNvSpPr>
+            <a:spLocks noGrp="1"/>
+          </p:cNvSpPr>
+          <p:nvPr>
+            <p:ph type="body" idx="1"/>
+          </p:nvPr>
+        </p:nvSpPr>
+        <p:spPr/>
+        <p:txBody>
+          <a:bodyPr/>
+          <a:lstStyle/>
+          <a:p>
+            <a:r>
+              <a:rPr lang="en-US" dirty="0"/>
+              <a:t/>
+            </a:r>
+            <a:endParaRPr lang="en-US" dirty="0"/>
+          </a:p>
+        </p:txBody>
+      </p:sp>
+      <p:sp>
+        <p:nvSpPr>
+          <p:cNvPr id="4" name="Slide Number Placeholder 3"/>
+          <p:cNvSpPr>
+            <a:spLocks noGrp="1"/>
+          </p:cNvSpPr>
+          <p:nvPr>
+            <p:ph type="sldNum" sz="quarter" idx="10"/>
+          </p:nvPr>
+        </p:nvSpPr>
+        <p:spPr/>
+        <p:txBody>
+          <a:bodyPr/>
+          <a:lstStyle/>
+          <a:p>
+            <a:fld id="{F7021451-1387-4CA6-816F-3879F97B5CBC}" type="slidenum">
+              <a:rPr lang="en-US"/>
+              <a:t>6</a:t>
+            </a:fld>
+            <a:endParaRPr lang="en-US"/>
+          </a:p>
+        </p:txBody>
+      </p:sp>
+    </p:spTree>
+    <p:extLst>
+      <p:ext uri="{BB962C8B-B14F-4D97-AF65-F5344CB8AC3E}">
+        <p14:creationId xmlns:p14="http://schemas.microsoft.com/office/powerpoint/2010/main" val="1024086991"/>
+      </p:ext>
+    </p:extLst>
+  </p:cSld>
+  <p:clrMapOvr>
+    <a:masterClrMapping/>
+  </p:clrMapOvr>
+</p:notes>
+</file>
+
+<file path=ppt/notesSlides/notesSlide7.xml><?xml version="1.0" encoding="utf-8"?>
+<p:notes xmlns:a="http://schemas.openxmlformats.org/drawingml/2006/main" xmlns:r="http://schemas.openxmlformats.org/officeDocument/2006/relationships" xmlns:p="http://schemas.openxmlformats.org/presentationml/2006/main">
+  <p:cSld>
+    <p:spTree>
+      <p:nvGrpSpPr>
+        <p:cNvPr id="1" name=""/>
+        <p:cNvGrpSpPr/>
+        <p:nvPr/>
+      </p:nvGrpSpPr>
+      <p:grpSpPr>
+        <a:xfrm>
+          <a:off x="0" y="0"/>
+          <a:ext cx="0" cy="0"/>
+          <a:chOff x="0" y="0"/>
+          <a:chExt cx="0" cy="0"/>
+        </a:xfrm>
+      </p:grpSpPr>
+      <p:sp>
+        <p:nvSpPr>
+          <p:cNvPr id="2" name="Slide Image Placeholder 1"/>
+          <p:cNvSpPr>
+            <a:spLocks noGrp="1" noRot="1" noChangeAspect="1"/>
+          </p:cNvSpPr>
+          <p:nvPr>
+            <p:ph type="sldImg"/>
+          </p:nvPr>
+        </p:nvSpPr>
+        <p:spPr/>
+      </p:sp>
+      <p:sp>
+        <p:nvSpPr>
+          <p:cNvPr id="3" name="Notes Placeholder 2"/>
+          <p:cNvSpPr>
+            <a:spLocks noGrp="1"/>
+          </p:cNvSpPr>
+          <p:nvPr>
+            <p:ph type="body" idx="1"/>
+          </p:nvPr>
+        </p:nvSpPr>
+        <p:spPr/>
+        <p:txBody>
+          <a:bodyPr/>
+          <a:lstStyle/>
+          <a:p>
+            <a:r>
+              <a:rPr lang="en-US" dirty="0"/>
+              <a:t/>
+            </a:r>
+            <a:endParaRPr lang="en-US" dirty="0"/>
+          </a:p>
+        </p:txBody>
+      </p:sp>
+      <p:sp>
+        <p:nvSpPr>
+          <p:cNvPr id="4" name="Slide Number Placeholder 3"/>
+          <p:cNvSpPr>
+            <a:spLocks noGrp="1"/>
+          </p:cNvSpPr>
+          <p:nvPr>
+            <p:ph type="sldNum" sz="quarter" idx="10"/>
+          </p:nvPr>
+        </p:nvSpPr>
+        <p:spPr/>
+        <p:txBody>
+          <a:bodyPr/>
+          <a:lstStyle/>
+          <a:p>
+            <a:fld id="{F7021451-1387-4CA6-816F-3879F97B5CBC}" type="slidenum">
+              <a:rPr lang="en-US"/>
+              <a:t>7</a:t>
             </a:fld>
             <a:endParaRPr lang="en-US"/>
           </a:p>
@@ -1233,18 +1411,240 @@
       </p:grpSpPr>
       <p:sp>
         <p:nvSpPr>
-          <p:cNvPr id="2" name="Shape 0"/>
-          <p:cNvSpPr/>
-          <p:nvPr/>
-        </p:nvSpPr>
-        <p:spPr>
-          <a:xfrm>
-            <a:off x="9052560" y="1645920"/>
-            <a:ext cx="2651760" cy="1737360"/>
+          <p:cNvPr id="2" name="Text 0"/>
+          <p:cNvSpPr/>
+          <p:nvPr/>
+        </p:nvSpPr>
+        <p:spPr>
+          <a:xfrm>
+            <a:off x="640080" y="502920"/>
+            <a:ext cx="10058400" cy="365760"/>
+          </a:xfrm>
+          <a:prstGeom prst="rect">
+            <a:avLst/>
+          </a:prstGeom>
+          <a:noFill/>
+          <a:ln/>
+        </p:spPr>
+        <p:txBody>
+          <a:bodyPr wrap="square" rtlCol="0" anchor="ctr"/>
+          <a:lstStyle/>
+          <a:p>
+            <a:pPr indent="0" marL="0">
+              <a:buNone/>
+            </a:pPr>
+            <a:r>
+              <a:rPr lang="en-US" sz="1300" b="1" spc="300" kern="0" dirty="0">
+                <a:solidFill>
+                  <a:srgbClr val="27D3EE"/>
+                </a:solidFill>
+                <a:latin typeface="Calibri" pitchFamily="34" charset="0"/>
+                <a:ea typeface="Calibri" pitchFamily="34" charset="-122"/>
+                <a:cs typeface="Calibri" pitchFamily="34" charset="-120"/>
+              </a:rPr>
+              <a:t>ФАЗА 4 · НЕДЕЛЯ 11 · ФИНАЛЬНЫЙ ПРОЕКТ</a:t>
+            </a:r>
+            <a:endParaRPr lang="en-US" sz="1300" dirty="0"/>
+          </a:p>
+        </p:txBody>
+      </p:sp>
+      <p:sp>
+        <p:nvSpPr>
+          <p:cNvPr id="3" name="Text 1"/>
+          <p:cNvSpPr/>
+          <p:nvPr/>
+        </p:nvSpPr>
+        <p:spPr>
+          <a:xfrm>
+            <a:off x="640080" y="1371600"/>
+            <a:ext cx="8229600" cy="1097280"/>
+          </a:xfrm>
+          <a:prstGeom prst="rect">
+            <a:avLst/>
+          </a:prstGeom>
+          <a:noFill/>
+          <a:ln/>
+        </p:spPr>
+        <p:txBody>
+          <a:bodyPr wrap="square" rtlCol="0" anchor="ctr"/>
+          <a:lstStyle/>
+          <a:p>
+            <a:pPr indent="0" marL="0">
+              <a:buNone/>
+            </a:pPr>
+            <a:r>
+              <a:rPr lang="en-US" sz="5200" b="1" dirty="0">
+                <a:solidFill>
+                  <a:srgbClr val="FFFFFF"/>
+                </a:solidFill>
+                <a:latin typeface="Calibri" pitchFamily="34" charset="0"/>
+                <a:ea typeface="Calibri" pitchFamily="34" charset="-122"/>
+                <a:cs typeface="Calibri" pitchFamily="34" charset="-120"/>
+              </a:rPr>
+              <a:t>Модель и интерфейс</a:t>
+            </a:r>
+            <a:endParaRPr lang="en-US" sz="5200" dirty="0"/>
+          </a:p>
+        </p:txBody>
+      </p:sp>
+      <p:sp>
+        <p:nvSpPr>
+          <p:cNvPr id="4" name="Text 2"/>
+          <p:cNvSpPr/>
+          <p:nvPr/>
+        </p:nvSpPr>
+        <p:spPr>
+          <a:xfrm>
+            <a:off x="640080" y="2834640"/>
+            <a:ext cx="8229600" cy="548640"/>
+          </a:xfrm>
+          <a:prstGeom prst="rect">
+            <a:avLst/>
+          </a:prstGeom>
+          <a:noFill/>
+          <a:ln/>
+        </p:spPr>
+        <p:txBody>
+          <a:bodyPr wrap="square" rtlCol="0" anchor="ctr"/>
+          <a:lstStyle/>
+          <a:p>
+            <a:pPr indent="0" marL="0">
+              <a:buNone/>
+            </a:pPr>
+            <a:r>
+              <a:rPr lang="en-US" sz="2200" dirty="0">
+                <a:solidFill>
+                  <a:srgbClr val="D9D4F2"/>
+                </a:solidFill>
+                <a:latin typeface="Calibri" pitchFamily="34" charset="0"/>
+                <a:ea typeface="Calibri" pitchFamily="34" charset="-122"/>
+                <a:cs typeface="Calibri" pitchFamily="34" charset="-120"/>
+              </a:rPr>
+              <a:t>От модели — к готовому продукту</a:t>
+            </a:r>
+            <a:endParaRPr lang="en-US" sz="2200" dirty="0"/>
+          </a:p>
+        </p:txBody>
+      </p:sp>
+      <p:sp>
+        <p:nvSpPr>
+          <p:cNvPr id="5" name="Text 3"/>
+          <p:cNvSpPr/>
+          <p:nvPr/>
+        </p:nvSpPr>
+        <p:spPr>
+          <a:xfrm>
+            <a:off x="640080" y="3657600"/>
+            <a:ext cx="8229600" cy="457200"/>
+          </a:xfrm>
+          <a:prstGeom prst="rect">
+            <a:avLst/>
+          </a:prstGeom>
+          <a:noFill/>
+          <a:ln/>
+        </p:spPr>
+        <p:txBody>
+          <a:bodyPr wrap="square" rtlCol="0" anchor="ctr"/>
+          <a:lstStyle/>
+          <a:p>
+            <a:pPr indent="0" marL="0">
+              <a:buNone/>
+            </a:pPr>
+            <a:r>
+              <a:rPr lang="en-US" sz="1500" dirty="0">
+                <a:solidFill>
+                  <a:srgbClr val="9E96C8"/>
+                </a:solidFill>
+                <a:latin typeface="Calibri" pitchFamily="34" charset="0"/>
+                <a:ea typeface="Calibri" pitchFamily="34" charset="-122"/>
+                <a:cs typeface="Calibri" pitchFamily="34" charset="-120"/>
+              </a:rPr>
+              <a:t>Урок 22 · 90 минут · улучшение + Gradio + презентация</a:t>
+            </a:r>
+            <a:endParaRPr lang="en-US" sz="1500" dirty="0"/>
+          </a:p>
+        </p:txBody>
+      </p:sp>
+      <p:sp>
+        <p:nvSpPr>
+          <p:cNvPr id="6" name="Shape 4"/>
+          <p:cNvSpPr/>
+          <p:nvPr/>
+        </p:nvSpPr>
+        <p:spPr>
+          <a:xfrm>
+            <a:off x="8961120" y="3291840"/>
+            <a:ext cx="1554480" cy="292608"/>
           </a:xfrm>
           <a:prstGeom prst="roundRect">
             <a:avLst>
-              <a:gd name="adj" fmla="val 5263"/>
+              <a:gd name="adj" fmla="val 37500"/>
+            </a:avLst>
+          </a:prstGeom>
+          <a:solidFill>
+            <a:srgbClr val="27D3EE"/>
+          </a:solidFill>
+          <a:ln/>
+        </p:spPr>
+      </p:sp>
+      <p:sp>
+        <p:nvSpPr>
+          <p:cNvPr id="7" name="Shape 5"/>
+          <p:cNvSpPr/>
+          <p:nvPr/>
+        </p:nvSpPr>
+        <p:spPr>
+          <a:xfrm>
+            <a:off x="8778240" y="3657600"/>
+            <a:ext cx="1920240" cy="292608"/>
+          </a:xfrm>
+          <a:prstGeom prst="roundRect">
+            <a:avLst>
+              <a:gd name="adj" fmla="val 37500"/>
+            </a:avLst>
+          </a:prstGeom>
+          <a:solidFill>
+            <a:srgbClr val="8B7DF5"/>
+          </a:solidFill>
+          <a:ln/>
+        </p:spPr>
+      </p:sp>
+      <p:sp>
+        <p:nvSpPr>
+          <p:cNvPr id="8" name="Shape 6"/>
+          <p:cNvSpPr/>
+          <p:nvPr/>
+        </p:nvSpPr>
+        <p:spPr>
+          <a:xfrm>
+            <a:off x="8778240" y="4023360"/>
+            <a:ext cx="1920240" cy="292608"/>
+          </a:xfrm>
+          <a:prstGeom prst="roundRect">
+            <a:avLst>
+              <a:gd name="adj" fmla="val 37500"/>
+            </a:avLst>
+          </a:prstGeom>
+          <a:solidFill>
+            <a:srgbClr val="5B4FC4"/>
+          </a:solidFill>
+          <a:ln/>
+        </p:spPr>
+      </p:sp>
+      <p:sp>
+        <p:nvSpPr>
+          <p:cNvPr id="9" name="Shape 7"/>
+          <p:cNvSpPr/>
+          <p:nvPr/>
+        </p:nvSpPr>
+        <p:spPr>
+          <a:xfrm>
+            <a:off x="8869680" y="4389120"/>
+            <a:ext cx="1737360" cy="292608"/>
+          </a:xfrm>
+          <a:prstGeom prst="roundRect">
+            <a:avLst>
+              <a:gd name="adj" fmla="val 37500"/>
             </a:avLst>
           </a:prstGeom>
           <a:solidFill>
@@ -1252,288 +1652,6 @@
           </a:solidFill>
           <a:ln/>
         </p:spPr>
-      </p:sp>
-      <p:sp>
-        <p:nvSpPr>
-          <p:cNvPr id="3" name="Shape 1"/>
-          <p:cNvSpPr/>
-          <p:nvPr/>
-        </p:nvSpPr>
-        <p:spPr>
-          <a:xfrm>
-            <a:off x="9052560" y="1645920"/>
-            <a:ext cx="2651760" cy="384048"/>
-          </a:xfrm>
-          <a:prstGeom prst="roundRect">
-            <a:avLst>
-              <a:gd name="adj" fmla="val 23810"/>
-            </a:avLst>
-          </a:prstGeom>
-          <a:solidFill>
-            <a:srgbClr val="5B4FC4"/>
-          </a:solidFill>
-          <a:ln/>
-        </p:spPr>
-      </p:sp>
-      <p:sp>
-        <p:nvSpPr>
-          <p:cNvPr id="4" name="Shape 2"/>
-          <p:cNvSpPr/>
-          <p:nvPr/>
-        </p:nvSpPr>
-        <p:spPr>
-          <a:xfrm>
-            <a:off x="9235440" y="1773936"/>
-            <a:ext cx="128016" cy="128016"/>
-          </a:xfrm>
-          <a:prstGeom prst="ellipse">
-            <a:avLst/>
-          </a:prstGeom>
-          <a:solidFill>
-            <a:srgbClr val="FF7A8A"/>
-          </a:solidFill>
-          <a:ln/>
-        </p:spPr>
-      </p:sp>
-      <p:sp>
-        <p:nvSpPr>
-          <p:cNvPr id="5" name="Shape 3"/>
-          <p:cNvSpPr/>
-          <p:nvPr/>
-        </p:nvSpPr>
-        <p:spPr>
-          <a:xfrm>
-            <a:off x="9445752" y="1773936"/>
-            <a:ext cx="128016" cy="128016"/>
-          </a:xfrm>
-          <a:prstGeom prst="ellipse">
-            <a:avLst/>
-          </a:prstGeom>
-          <a:solidFill>
-            <a:srgbClr val="FFD36E"/>
-          </a:solidFill>
-          <a:ln/>
-        </p:spPr>
-      </p:sp>
-      <p:sp>
-        <p:nvSpPr>
-          <p:cNvPr id="6" name="Shape 4"/>
-          <p:cNvSpPr/>
-          <p:nvPr/>
-        </p:nvSpPr>
-        <p:spPr>
-          <a:xfrm>
-            <a:off x="9656064" y="1773936"/>
-            <a:ext cx="128016" cy="128016"/>
-          </a:xfrm>
-          <a:prstGeom prst="ellipse">
-            <a:avLst/>
-          </a:prstGeom>
-          <a:solidFill>
-            <a:srgbClr val="6EE7B7"/>
-          </a:solidFill>
-          <a:ln/>
-        </p:spPr>
-      </p:sp>
-      <p:sp>
-        <p:nvSpPr>
-          <p:cNvPr id="7" name="Shape 5"/>
-          <p:cNvSpPr/>
-          <p:nvPr/>
-        </p:nvSpPr>
-        <p:spPr>
-          <a:xfrm>
-            <a:off x="9281160" y="2286000"/>
-            <a:ext cx="2194560" cy="320040"/>
-          </a:xfrm>
-          <a:prstGeom prst="roundRect">
-            <a:avLst>
-              <a:gd name="adj" fmla="val 14286"/>
-            </a:avLst>
-          </a:prstGeom>
-          <a:solidFill>
-            <a:srgbClr val="241E42"/>
-          </a:solidFill>
-          <a:ln/>
-        </p:spPr>
-      </p:sp>
-      <p:sp>
-        <p:nvSpPr>
-          <p:cNvPr id="8" name="Shape 6"/>
-          <p:cNvSpPr/>
-          <p:nvPr/>
-        </p:nvSpPr>
-        <p:spPr>
-          <a:xfrm>
-            <a:off x="9281160" y="2743200"/>
-            <a:ext cx="1371600" cy="365760"/>
-          </a:xfrm>
-          <a:prstGeom prst="roundRect">
-            <a:avLst>
-              <a:gd name="adj" fmla="val 15000"/>
-            </a:avLst>
-          </a:prstGeom>
-          <a:solidFill>
-            <a:srgbClr val="27D3EE"/>
-          </a:solidFill>
-          <a:ln/>
-        </p:spPr>
-      </p:sp>
-      <p:sp>
-        <p:nvSpPr>
-          <p:cNvPr id="9" name="Text 7"/>
-          <p:cNvSpPr/>
-          <p:nvPr/>
-        </p:nvSpPr>
-        <p:spPr>
-          <a:xfrm>
-            <a:off x="594360" y="1554480"/>
-            <a:ext cx="7955280" cy="365760"/>
-          </a:xfrm>
-          <a:prstGeom prst="rect">
-            <a:avLst/>
-          </a:prstGeom>
-          <a:noFill/>
-          <a:ln/>
-        </p:spPr>
-        <p:txBody>
-          <a:bodyPr wrap="square" rtlCol="0" anchor="t"/>
-          <a:lstStyle/>
-          <a:p>
-            <a:pPr indent="0" marL="0">
-              <a:buNone/>
-            </a:pPr>
-            <a:r>
-              <a:rPr lang="en-US" sz="1400" b="1" spc="200" kern="0" dirty="0">
-                <a:solidFill>
-                  <a:srgbClr val="27D3EE"/>
-                </a:solidFill>
-                <a:latin typeface="Calibri" pitchFamily="34" charset="0"/>
-                <a:ea typeface="Calibri" pitchFamily="34" charset="-122"/>
-                <a:cs typeface="Calibri" pitchFamily="34" charset="-120"/>
-              </a:rPr>
-              <a:t>ФАЗА 6 · НЕДЕЛЯ 11 · ФИНАЛЬНЫЙ ПРОЕКТ</a:t>
-            </a:r>
-            <a:endParaRPr lang="en-US" sz="1400" dirty="0"/>
-          </a:p>
-        </p:txBody>
-      </p:sp>
-      <p:sp>
-        <p:nvSpPr>
-          <p:cNvPr id="10" name="Text 8"/>
-          <p:cNvSpPr/>
-          <p:nvPr/>
-        </p:nvSpPr>
-        <p:spPr>
-          <a:xfrm>
-            <a:off x="594360" y="2011680"/>
-            <a:ext cx="8229600" cy="914400"/>
-          </a:xfrm>
-          <a:prstGeom prst="rect">
-            <a:avLst/>
-          </a:prstGeom>
-          <a:noFill/>
-          <a:ln/>
-        </p:spPr>
-        <p:txBody>
-          <a:bodyPr wrap="square" rtlCol="0" anchor="t"/>
-          <a:lstStyle/>
-          <a:p>
-            <a:pPr indent="0" marL="0">
-              <a:buNone/>
-            </a:pPr>
-            <a:r>
-              <a:rPr lang="en-US" sz="4400" b="1" dirty="0">
-                <a:solidFill>
-                  <a:srgbClr val="FFFFFF"/>
-                </a:solidFill>
-                <a:latin typeface="Calibri" pitchFamily="34" charset="0"/>
-                <a:ea typeface="Calibri" pitchFamily="34" charset="-122"/>
-                <a:cs typeface="Calibri" pitchFamily="34" charset="-120"/>
-              </a:rPr>
-              <a:t>Модель и интерфейс</a:t>
-            </a:r>
-            <a:endParaRPr lang="en-US" sz="4400" dirty="0"/>
-          </a:p>
-        </p:txBody>
-      </p:sp>
-      <p:sp>
-        <p:nvSpPr>
-          <p:cNvPr id="11" name="Text 9"/>
-          <p:cNvSpPr/>
-          <p:nvPr/>
-        </p:nvSpPr>
-        <p:spPr>
-          <a:xfrm>
-            <a:off x="594360" y="3108960"/>
-            <a:ext cx="8229600" cy="548640"/>
-          </a:xfrm>
-          <a:prstGeom prst="rect">
-            <a:avLst/>
-          </a:prstGeom>
-          <a:noFill/>
-          <a:ln/>
-        </p:spPr>
-        <p:txBody>
-          <a:bodyPr wrap="square" rtlCol="0" anchor="t"/>
-          <a:lstStyle/>
-          <a:p>
-            <a:pPr indent="0" marL="0">
-              <a:buNone/>
-            </a:pPr>
-            <a:r>
-              <a:rPr lang="en-US" sz="2400" dirty="0">
-                <a:solidFill>
-                  <a:srgbClr val="D9D4F2"/>
-                </a:solidFill>
-                <a:latin typeface="Calibri" pitchFamily="34" charset="0"/>
-                <a:ea typeface="Calibri" pitchFamily="34" charset="-122"/>
-                <a:cs typeface="Calibri" pitchFamily="34" charset="-120"/>
-              </a:rPr>
-              <a:t>От модели — к готовому продукту</a:t>
-            </a:r>
-            <a:endParaRPr lang="en-US" sz="2400" dirty="0"/>
-          </a:p>
-        </p:txBody>
-      </p:sp>
-      <p:sp>
-        <p:nvSpPr>
-          <p:cNvPr id="12" name="Text 10"/>
-          <p:cNvSpPr/>
-          <p:nvPr/>
-        </p:nvSpPr>
-        <p:spPr>
-          <a:xfrm>
-            <a:off x="594360" y="4023360"/>
-            <a:ext cx="8229600" cy="365760"/>
-          </a:xfrm>
-          <a:prstGeom prst="rect">
-            <a:avLst/>
-          </a:prstGeom>
-          <a:noFill/>
-          <a:ln/>
-        </p:spPr>
-        <p:txBody>
-          <a:bodyPr wrap="square" rtlCol="0" anchor="t"/>
-          <a:lstStyle/>
-          <a:p>
-            <a:pPr indent="0" marL="0">
-              <a:buNone/>
-            </a:pPr>
-            <a:r>
-              <a:rPr lang="en-US" sz="1500" dirty="0">
-                <a:solidFill>
-                  <a:srgbClr val="9E96C8"/>
-                </a:solidFill>
-                <a:latin typeface="Calibri" pitchFamily="34" charset="0"/>
-                <a:ea typeface="Calibri" pitchFamily="34" charset="-122"/>
-                <a:cs typeface="Calibri" pitchFamily="34" charset="-120"/>
-              </a:rPr>
-              <a:t>Урок 22 · 90 минут · улучшение + Gradio + презентация</a:t>
-            </a:r>
-            <a:endParaRPr lang="en-US" sz="1500" dirty="0"/>
-          </a:p>
-        </p:txBody>
       </p:sp>
     </p:spTree>
   </p:cSld>
@@ -1575,24 +1693,24 @@
         </p:nvSpPr>
         <p:spPr>
           <a:xfrm>
-            <a:off x="594360" y="457200"/>
-            <a:ext cx="11002975" cy="320040"/>
-          </a:xfrm>
-          <a:prstGeom prst="rect">
-            <a:avLst/>
-          </a:prstGeom>
-          <a:noFill/>
-          <a:ln/>
-        </p:spPr>
-        <p:txBody>
-          <a:bodyPr wrap="square" rtlCol="0" anchor="t"/>
+            <a:off x="640080" y="502920"/>
+            <a:ext cx="10058400" cy="365760"/>
+          </a:xfrm>
+          <a:prstGeom prst="rect">
+            <a:avLst/>
+          </a:prstGeom>
+          <a:noFill/>
+          <a:ln/>
+        </p:spPr>
+        <p:txBody>
+          <a:bodyPr wrap="square" rtlCol="0" anchor="ctr"/>
           <a:lstStyle/>
           <a:p>
             <a:pPr indent="0" marL="0">
               <a:buNone/>
             </a:pPr>
             <a:r>
-              <a:rPr lang="en-US" sz="1300" b="1" spc="200" kern="0" dirty="0">
+              <a:rPr lang="en-US" sz="1300" b="1" spc="300" kern="0" dirty="0">
                 <a:solidFill>
                   <a:srgbClr val="27D3EE"/>
                 </a:solidFill>
@@ -1600,38 +1718,62 @@
                 <a:ea typeface="Calibri" pitchFamily="34" charset="-122"/>
                 <a:cs typeface="Calibri" pitchFamily="34" charset="-120"/>
               </a:rPr>
-              <a:t>ЧТО ЗНАЧИТ «УЛУЧШИТЬ»</a:t>
+              <a:t>ВОВЛЕЧЕНИЕ · 0–5 МИН</a:t>
             </a:r>
             <a:endParaRPr lang="en-US" sz="1300" dirty="0"/>
           </a:p>
         </p:txBody>
       </p:sp>
-      <p:sp>
-        <p:nvSpPr>
-          <p:cNvPr id="3" name="Text 1"/>
-          <p:cNvSpPr/>
-          <p:nvPr/>
-        </p:nvSpPr>
-        <p:spPr>
-          <a:xfrm>
-            <a:off x="594360" y="749808"/>
-            <a:ext cx="11002975" cy="822960"/>
-          </a:xfrm>
-          <a:prstGeom prst="rect">
-            <a:avLst/>
-          </a:prstGeom>
-          <a:noFill/>
-          <a:ln/>
-        </p:spPr>
-        <p:txBody>
-          <a:bodyPr wrap="square" rtlCol="0" anchor="t"/>
+      <p:pic>
+        <p:nvPicPr>
+          <p:cNvPr id="3" name="Image 0" descr="preencoded.png">    </p:cNvPr>
+          <p:cNvPicPr>
+            <a:picLocks noChangeAspect="1"/>
+          </p:cNvPicPr>
+          <p:nvPr/>
+        </p:nvPicPr>
+        <p:blipFill>
+          <a:blip r:embed="rId1"/>
+          <a:stretch>
+            <a:fillRect/>
+          </a:stretch>
+        </p:blipFill>
+        <p:spPr>
+          <a:xfrm>
+            <a:off x="640080" y="1143000"/>
+            <a:ext cx="868680" cy="868680"/>
+          </a:xfrm>
+          <a:prstGeom prst="rect">
+            <a:avLst/>
+          </a:prstGeom>
+        </p:spPr>
+      </p:pic>
+      <p:sp>
+        <p:nvSpPr>
+          <p:cNvPr id="4" name="Text 1"/>
+          <p:cNvSpPr/>
+          <p:nvPr/>
+        </p:nvSpPr>
+        <p:spPr>
+          <a:xfrm>
+            <a:off x="640080" y="2148840"/>
+            <a:ext cx="10972800" cy="731520"/>
+          </a:xfrm>
+          <a:prstGeom prst="rect">
+            <a:avLst/>
+          </a:prstGeom>
+          <a:noFill/>
+          <a:ln/>
+        </p:spPr>
+        <p:txBody>
+          <a:bodyPr wrap="square" rtlCol="0" anchor="ctr"/>
           <a:lstStyle/>
           <a:p>
             <a:pPr indent="0" marL="0">
               <a:buNone/>
             </a:pPr>
             <a:r>
-              <a:rPr lang="en-US" sz="3000" b="1" dirty="0">
+              <a:rPr lang="en-US" sz="3400" b="1" dirty="0">
                 <a:solidFill>
                   <a:srgbClr val="FFFFFF"/>
                 </a:solidFill>
@@ -1639,26 +1781,65 @@
                 <a:ea typeface="Calibri" pitchFamily="34" charset="-122"/>
                 <a:cs typeface="Calibri" pitchFamily="34" charset="-120"/>
               </a:rPr>
-              <a:t>Не 100%, а честно и лучше</a:t>
-            </a:r>
-            <a:endParaRPr lang="en-US" sz="3000" dirty="0"/>
-          </a:p>
-        </p:txBody>
-      </p:sp>
-      <p:sp>
-        <p:nvSpPr>
-          <p:cNvPr id="4" name="Shape 2"/>
-          <p:cNvSpPr/>
-          <p:nvPr/>
-        </p:nvSpPr>
-        <p:spPr>
-          <a:xfrm>
-            <a:off x="594360" y="2286000"/>
-            <a:ext cx="2476424" cy="2651760"/>
+              <a:t>У тебя уже есть работающая модель.</a:t>
+            </a:r>
+            <a:endParaRPr lang="en-US" sz="3400" dirty="0"/>
+          </a:p>
+        </p:txBody>
+      </p:sp>
+      <p:sp>
+        <p:nvSpPr>
+          <p:cNvPr id="5" name="Text 2"/>
+          <p:cNvSpPr/>
+          <p:nvPr/>
+        </p:nvSpPr>
+        <p:spPr>
+          <a:xfrm>
+            <a:off x="658368" y="2880360"/>
+            <a:ext cx="10972800" cy="640080"/>
+          </a:xfrm>
+          <a:prstGeom prst="rect">
+            <a:avLst/>
+          </a:prstGeom>
+          <a:noFill/>
+          <a:ln/>
+        </p:spPr>
+        <p:txBody>
+          <a:bodyPr wrap="square" rtlCol="0" anchor="ctr"/>
+          <a:lstStyle/>
+          <a:p>
+            <a:pPr indent="0" marL="0">
+              <a:buNone/>
+            </a:pPr>
+            <a:r>
+              <a:rPr lang="en-US" sz="2600" b="1" dirty="0">
+                <a:solidFill>
+                  <a:srgbClr val="27D3EE"/>
+                </a:solidFill>
+                <a:latin typeface="Calibri" pitchFamily="34" charset="0"/>
+                <a:ea typeface="Calibri" pitchFamily="34" charset="-122"/>
+                <a:cs typeface="Calibri" pitchFamily="34" charset="-120"/>
+              </a:rPr>
+              <a:t>Сегодня она станет тем, что можно показать.</a:t>
+            </a:r>
+            <a:endParaRPr lang="en-US" sz="2600" dirty="0"/>
+          </a:p>
+        </p:txBody>
+      </p:sp>
+      <p:sp>
+        <p:nvSpPr>
+          <p:cNvPr id="6" name="Shape 3"/>
+          <p:cNvSpPr/>
+          <p:nvPr/>
+        </p:nvSpPr>
+        <p:spPr>
+          <a:xfrm>
+            <a:off x="640080" y="3931920"/>
+            <a:ext cx="5257800" cy="1554480"/>
           </a:xfrm>
           <a:prstGeom prst="roundRect">
             <a:avLst>
-              <a:gd name="adj" fmla="val 4431"/>
+              <a:gd name="adj" fmla="val 7059"/>
             </a:avLst>
           </a:prstGeom>
           <a:solidFill>
@@ -1669,58 +1850,82 @@
       </p:sp>
       <p:sp>
         <p:nvSpPr>
-          <p:cNvPr id="5" name="Shape 3"/>
-          <p:cNvSpPr/>
-          <p:nvPr/>
-        </p:nvSpPr>
-        <p:spPr>
-          <a:xfrm>
-            <a:off x="1512532" y="2560320"/>
-            <a:ext cx="640080" cy="640080"/>
+          <p:cNvPr id="7" name="Shape 4"/>
+          <p:cNvSpPr/>
+          <p:nvPr/>
+        </p:nvSpPr>
+        <p:spPr>
+          <a:xfrm>
+            <a:off x="914400" y="4206240"/>
+            <a:ext cx="1005840" cy="1005840"/>
           </a:xfrm>
           <a:prstGeom prst="ellipse">
             <a:avLst/>
           </a:prstGeom>
           <a:solidFill>
-            <a:srgbClr val="5B4FC4"/>
+            <a:srgbClr val="2C2552"/>
           </a:solidFill>
           <a:ln/>
         </p:spPr>
       </p:sp>
-      <p:sp>
-        <p:nvSpPr>
-          <p:cNvPr id="6" name="Text 4"/>
-          <p:cNvSpPr/>
-          <p:nvPr/>
-        </p:nvSpPr>
-        <p:spPr>
-          <a:xfrm>
-            <a:off x="1512532" y="2560320"/>
-            <a:ext cx="640080" cy="640080"/>
-          </a:xfrm>
-          <a:prstGeom prst="rect">
-            <a:avLst/>
-          </a:prstGeom>
-          <a:noFill/>
-          <a:ln/>
-        </p:spPr>
-        <p:txBody>
-          <a:bodyPr wrap="square" rtlCol="0" anchor="ctr"/>
-          <a:lstStyle/>
-          <a:p>
-            <a:pPr algn="ctr" indent="0" marL="0">
+      <p:pic>
+        <p:nvPicPr>
+          <p:cNvPr id="8" name="Image 1" descr="preencoded.png">    </p:cNvPr>
+          <p:cNvPicPr>
+            <a:picLocks noChangeAspect="1"/>
+          </p:cNvPicPr>
+          <p:nvPr/>
+        </p:nvPicPr>
+        <p:blipFill>
+          <a:blip r:embed="rId2"/>
+          <a:stretch>
+            <a:fillRect/>
+          </a:stretch>
+        </p:blipFill>
+        <p:spPr>
+          <a:xfrm>
+            <a:off x="1143000" y="4434840"/>
+            <a:ext cx="548640" cy="548640"/>
+          </a:xfrm>
+          <a:prstGeom prst="rect">
+            <a:avLst/>
+          </a:prstGeom>
+        </p:spPr>
+      </p:pic>
+      <p:sp>
+        <p:nvSpPr>
+          <p:cNvPr id="9" name="Text 5"/>
+          <p:cNvSpPr/>
+          <p:nvPr/>
+        </p:nvSpPr>
+        <p:spPr>
+          <a:xfrm>
+            <a:off x="2103120" y="4224528"/>
+            <a:ext cx="3566160" cy="457200"/>
+          </a:xfrm>
+          <a:prstGeom prst="rect">
+            <a:avLst/>
+          </a:prstGeom>
+          <a:noFill/>
+          <a:ln/>
+        </p:spPr>
+        <p:txBody>
+          <a:bodyPr wrap="square" rtlCol="0" anchor="ctr"/>
+          <a:lstStyle/>
+          <a:p>
+            <a:pPr indent="0" marL="0">
               <a:buNone/>
             </a:pPr>
             <a:r>
               <a:rPr lang="en-US" sz="2000" b="1" dirty="0">
                 <a:solidFill>
-                  <a:srgbClr val="FFFFFF"/>
-                </a:solidFill>
-                <a:latin typeface="Calibri" pitchFamily="34" charset="0"/>
-                <a:ea typeface="Calibri" pitchFamily="34" charset="-122"/>
-                <a:cs typeface="Calibri" pitchFamily="34" charset="-120"/>
-              </a:rPr>
-              <a:t>1</a:t>
+                  <a:srgbClr val="2DD4BF"/>
+                </a:solidFill>
+                <a:latin typeface="Calibri" pitchFamily="34" charset="0"/>
+                <a:ea typeface="Calibri" pitchFamily="34" charset="-122"/>
+                <a:cs typeface="Calibri" pitchFamily="34" charset="-120"/>
+              </a:rPr>
+              <a:t>Улучшить</a:t>
             </a:r>
             <a:endParaRPr lang="en-US" sz="2000" dirty="0"/>
           </a:p>
@@ -1728,14 +1933,14 @@
       </p:sp>
       <p:sp>
         <p:nvSpPr>
-          <p:cNvPr id="7" name="Text 5"/>
-          <p:cNvSpPr/>
-          <p:nvPr/>
-        </p:nvSpPr>
-        <p:spPr>
-          <a:xfrm>
-            <a:off x="685800" y="3429000"/>
-            <a:ext cx="2293544" cy="457200"/>
+          <p:cNvPr id="10" name="Text 6"/>
+          <p:cNvSpPr/>
+          <p:nvPr/>
+        </p:nvSpPr>
+        <p:spPr>
+          <a:xfrm>
+            <a:off x="2103120" y="4681728"/>
+            <a:ext cx="3611880" cy="731520"/>
           </a:xfrm>
           <a:prstGeom prst="rect">
             <a:avLst/>
@@ -1747,53 +1952,11 @@
           <a:bodyPr wrap="square" rtlCol="0" anchor="t"/>
           <a:lstStyle/>
           <a:p>
-            <a:pPr algn="ctr" indent="0" marL="0">
-              <a:buNone/>
-            </a:pPr>
-            <a:r>
-              <a:rPr lang="en-US" sz="1600" b="1" dirty="0">
-                <a:solidFill>
-                  <a:srgbClr val="FFFFFF"/>
-                </a:solidFill>
-                <a:latin typeface="Calibri" pitchFamily="34" charset="0"/>
-                <a:ea typeface="Calibri" pitchFamily="34" charset="-122"/>
-                <a:cs typeface="Calibri" pitchFamily="34" charset="-120"/>
-              </a:rPr>
-              <a:t>Другие модели</a:t>
-            </a:r>
-            <a:endParaRPr lang="en-US" sz="1600" dirty="0"/>
-          </a:p>
-        </p:txBody>
-      </p:sp>
-      <p:sp>
-        <p:nvSpPr>
-          <p:cNvPr id="8" name="Text 6"/>
-          <p:cNvSpPr/>
-          <p:nvPr/>
-        </p:nvSpPr>
-        <p:spPr>
-          <a:xfrm>
-            <a:off x="731520" y="3931920"/>
-            <a:ext cx="2202104" cy="822960"/>
-          </a:xfrm>
-          <a:prstGeom prst="rect">
-            <a:avLst/>
-          </a:prstGeom>
-          <a:noFill/>
-          <a:ln/>
-        </p:spPr>
-        <p:txBody>
-          <a:bodyPr wrap="square" rtlCol="0" anchor="t"/>
-          <a:lstStyle/>
-          <a:p>
-            <a:pPr algn="ctr" indent="0" marL="0">
-              <a:lnSpc>
-                <a:spcPct val="110000"/>
-              </a:lnSpc>
-              <a:buNone/>
-            </a:pPr>
-            <a:r>
-              <a:rPr lang="en-US" sz="1300" dirty="0">
+            <a:pPr indent="0" marL="0">
+              <a:buNone/>
+            </a:pPr>
+            <a:r>
+              <a:rPr lang="en-US" sz="1500" dirty="0">
                 <a:solidFill>
                   <a:srgbClr val="D9D4F2"/>
                 </a:solidFill>
@@ -1801,26 +1964,26 @@
                 <a:ea typeface="Calibri" pitchFamily="34" charset="-122"/>
                 <a:cs typeface="Calibri" pitchFamily="34" charset="-120"/>
               </a:rPr>
-              <a:t>AutoML, бустинг</a:t>
-            </a:r>
-            <a:endParaRPr lang="en-US" sz="1300" dirty="0"/>
-          </a:p>
-        </p:txBody>
-      </p:sp>
-      <p:sp>
-        <p:nvSpPr>
-          <p:cNvPr id="9" name="Shape 7"/>
-          <p:cNvSpPr/>
-          <p:nvPr/>
-        </p:nvSpPr>
-        <p:spPr>
-          <a:xfrm>
-            <a:off x="3436544" y="2286000"/>
-            <a:ext cx="2476424" cy="2651760"/>
+              <a:t>огранить алмаз — довести до блеска</a:t>
+            </a:r>
+            <a:endParaRPr lang="en-US" sz="1500" dirty="0"/>
+          </a:p>
+        </p:txBody>
+      </p:sp>
+      <p:sp>
+        <p:nvSpPr>
+          <p:cNvPr id="11" name="Shape 7"/>
+          <p:cNvSpPr/>
+          <p:nvPr/>
+        </p:nvSpPr>
+        <p:spPr>
+          <a:xfrm>
+            <a:off x="6172200" y="3931920"/>
+            <a:ext cx="5257800" cy="1554480"/>
           </a:xfrm>
           <a:prstGeom prst="roundRect">
             <a:avLst>
-              <a:gd name="adj" fmla="val 4431"/>
+              <a:gd name="adj" fmla="val 7059"/>
             </a:avLst>
           </a:prstGeom>
           <a:solidFill>
@@ -1831,58 +1994,82 @@
       </p:sp>
       <p:sp>
         <p:nvSpPr>
-          <p:cNvPr id="10" name="Shape 8"/>
-          <p:cNvSpPr/>
-          <p:nvPr/>
-        </p:nvSpPr>
-        <p:spPr>
-          <a:xfrm>
-            <a:off x="4354716" y="2560320"/>
-            <a:ext cx="640080" cy="640080"/>
+          <p:cNvPr id="12" name="Shape 8"/>
+          <p:cNvSpPr/>
+          <p:nvPr/>
+        </p:nvSpPr>
+        <p:spPr>
+          <a:xfrm>
+            <a:off x="6446520" y="4206240"/>
+            <a:ext cx="1005840" cy="1005840"/>
           </a:xfrm>
           <a:prstGeom prst="ellipse">
             <a:avLst/>
           </a:prstGeom>
           <a:solidFill>
-            <a:srgbClr val="8B7DF5"/>
+            <a:srgbClr val="2C2552"/>
           </a:solidFill>
           <a:ln/>
         </p:spPr>
       </p:sp>
-      <p:sp>
-        <p:nvSpPr>
-          <p:cNvPr id="11" name="Text 9"/>
-          <p:cNvSpPr/>
-          <p:nvPr/>
-        </p:nvSpPr>
-        <p:spPr>
-          <a:xfrm>
-            <a:off x="4354716" y="2560320"/>
-            <a:ext cx="640080" cy="640080"/>
-          </a:xfrm>
-          <a:prstGeom prst="rect">
-            <a:avLst/>
-          </a:prstGeom>
-          <a:noFill/>
-          <a:ln/>
-        </p:spPr>
-        <p:txBody>
-          <a:bodyPr wrap="square" rtlCol="0" anchor="ctr"/>
-          <a:lstStyle/>
-          <a:p>
-            <a:pPr algn="ctr" indent="0" marL="0">
+      <p:pic>
+        <p:nvPicPr>
+          <p:cNvPr id="13" name="Image 2" descr="preencoded.png">    </p:cNvPr>
+          <p:cNvPicPr>
+            <a:picLocks noChangeAspect="1"/>
+          </p:cNvPicPr>
+          <p:nvPr/>
+        </p:nvPicPr>
+        <p:blipFill>
+          <a:blip r:embed="rId3"/>
+          <a:stretch>
+            <a:fillRect/>
+          </a:stretch>
+        </p:blipFill>
+        <p:spPr>
+          <a:xfrm>
+            <a:off x="6675120" y="4434840"/>
+            <a:ext cx="548640" cy="548640"/>
+          </a:xfrm>
+          <a:prstGeom prst="rect">
+            <a:avLst/>
+          </a:prstGeom>
+        </p:spPr>
+      </p:pic>
+      <p:sp>
+        <p:nvSpPr>
+          <p:cNvPr id="14" name="Text 9"/>
+          <p:cNvSpPr/>
+          <p:nvPr/>
+        </p:nvSpPr>
+        <p:spPr>
+          <a:xfrm>
+            <a:off x="7635240" y="4224528"/>
+            <a:ext cx="3566160" cy="457200"/>
+          </a:xfrm>
+          <a:prstGeom prst="rect">
+            <a:avLst/>
+          </a:prstGeom>
+          <a:noFill/>
+          <a:ln/>
+        </p:spPr>
+        <p:txBody>
+          <a:bodyPr wrap="square" rtlCol="0" anchor="ctr"/>
+          <a:lstStyle/>
+          <a:p>
+            <a:pPr indent="0" marL="0">
               <a:buNone/>
             </a:pPr>
             <a:r>
               <a:rPr lang="en-US" sz="2000" b="1" dirty="0">
                 <a:solidFill>
-                  <a:srgbClr val="FFFFFF"/>
-                </a:solidFill>
-                <a:latin typeface="Calibri" pitchFamily="34" charset="0"/>
-                <a:ea typeface="Calibri" pitchFamily="34" charset="-122"/>
-                <a:cs typeface="Calibri" pitchFamily="34" charset="-120"/>
-              </a:rPr>
-              <a:t>2</a:t>
+                  <a:srgbClr val="2DD4BF"/>
+                </a:solidFill>
+                <a:latin typeface="Calibri" pitchFamily="34" charset="0"/>
+                <a:ea typeface="Calibri" pitchFamily="34" charset="-122"/>
+                <a:cs typeface="Calibri" pitchFamily="34" charset="-120"/>
+              </a:rPr>
+              <a:t>Упаковать</a:t>
             </a:r>
             <a:endParaRPr lang="en-US" sz="2000" dirty="0"/>
           </a:p>
@@ -1890,14 +2077,14 @@
       </p:sp>
       <p:sp>
         <p:nvSpPr>
-          <p:cNvPr id="12" name="Text 10"/>
-          <p:cNvSpPr/>
-          <p:nvPr/>
-        </p:nvSpPr>
-        <p:spPr>
-          <a:xfrm>
-            <a:off x="3527984" y="3429000"/>
-            <a:ext cx="2293544" cy="457200"/>
+          <p:cNvPr id="15" name="Text 10"/>
+          <p:cNvSpPr/>
+          <p:nvPr/>
+        </p:nvSpPr>
+        <p:spPr>
+          <a:xfrm>
+            <a:off x="7635240" y="4681728"/>
+            <a:ext cx="3611880" cy="731520"/>
           </a:xfrm>
           <a:prstGeom prst="rect">
             <a:avLst/>
@@ -1909,53 +2096,11 @@
           <a:bodyPr wrap="square" rtlCol="0" anchor="t"/>
           <a:lstStyle/>
           <a:p>
-            <a:pPr algn="ctr" indent="0" marL="0">
-              <a:buNone/>
-            </a:pPr>
-            <a:r>
-              <a:rPr lang="en-US" sz="1600" b="1" dirty="0">
-                <a:solidFill>
-                  <a:srgbClr val="FFFFFF"/>
-                </a:solidFill>
-                <a:latin typeface="Calibri" pitchFamily="34" charset="0"/>
-                <a:ea typeface="Calibri" pitchFamily="34" charset="-122"/>
-                <a:cs typeface="Calibri" pitchFamily="34" charset="-120"/>
-              </a:rPr>
-              <a:t>Признаки</a:t>
-            </a:r>
-            <a:endParaRPr lang="en-US" sz="1600" dirty="0"/>
-          </a:p>
-        </p:txBody>
-      </p:sp>
-      <p:sp>
-        <p:nvSpPr>
-          <p:cNvPr id="13" name="Text 11"/>
-          <p:cNvSpPr/>
-          <p:nvPr/>
-        </p:nvSpPr>
-        <p:spPr>
-          <a:xfrm>
-            <a:off x="3573704" y="3931920"/>
-            <a:ext cx="2202104" cy="822960"/>
-          </a:xfrm>
-          <a:prstGeom prst="rect">
-            <a:avLst/>
-          </a:prstGeom>
-          <a:noFill/>
-          <a:ln/>
-        </p:spPr>
-        <p:txBody>
-          <a:bodyPr wrap="square" rtlCol="0" anchor="t"/>
-          <a:lstStyle/>
-          <a:p>
-            <a:pPr algn="ctr" indent="0" marL="0">
-              <a:lnSpc>
-                <a:spcPct val="110000"/>
-              </a:lnSpc>
-              <a:buNone/>
-            </a:pPr>
-            <a:r>
-              <a:rPr lang="en-US" sz="1300" dirty="0">
+            <a:pPr indent="0" marL="0">
+              <a:buNone/>
+            </a:pPr>
+            <a:r>
+              <a:rPr lang="en-US" sz="1500" dirty="0">
                 <a:solidFill>
                   <a:srgbClr val="D9D4F2"/>
                 </a:solidFill>
@@ -1963,394 +2108,70 @@
                 <a:ea typeface="Calibri" pitchFamily="34" charset="-122"/>
                 <a:cs typeface="Calibri" pitchFamily="34" charset="-120"/>
               </a:rPr>
-              <a:t>новые, продуманные</a:t>
-            </a:r>
-            <a:endParaRPr lang="en-US" sz="1300" dirty="0"/>
-          </a:p>
-        </p:txBody>
-      </p:sp>
-      <p:sp>
-        <p:nvSpPr>
-          <p:cNvPr id="14" name="Shape 12"/>
-          <p:cNvSpPr/>
-          <p:nvPr/>
-        </p:nvSpPr>
-        <p:spPr>
-          <a:xfrm>
-            <a:off x="6278728" y="2286000"/>
-            <a:ext cx="2476424" cy="2651760"/>
-          </a:xfrm>
-          <a:prstGeom prst="roundRect">
-            <a:avLst>
-              <a:gd name="adj" fmla="val 4431"/>
-            </a:avLst>
-          </a:prstGeom>
-          <a:solidFill>
-            <a:srgbClr val="241E42"/>
-          </a:solidFill>
-          <a:ln/>
-        </p:spPr>
-      </p:sp>
-      <p:sp>
-        <p:nvSpPr>
-          <p:cNvPr id="15" name="Shape 13"/>
-          <p:cNvSpPr/>
-          <p:nvPr/>
-        </p:nvSpPr>
-        <p:spPr>
-          <a:xfrm>
-            <a:off x="7196899" y="2560320"/>
-            <a:ext cx="640080" cy="640080"/>
-          </a:xfrm>
-          <a:prstGeom prst="ellipse">
-            <a:avLst/>
-          </a:prstGeom>
-          <a:solidFill>
-            <a:srgbClr val="27D3EE"/>
-          </a:solidFill>
-          <a:ln/>
-        </p:spPr>
-      </p:sp>
-      <p:sp>
-        <p:nvSpPr>
-          <p:cNvPr id="16" name="Text 14"/>
-          <p:cNvSpPr/>
-          <p:nvPr/>
-        </p:nvSpPr>
-        <p:spPr>
-          <a:xfrm>
-            <a:off x="7196899" y="2560320"/>
-            <a:ext cx="640080" cy="640080"/>
-          </a:xfrm>
-          <a:prstGeom prst="rect">
-            <a:avLst/>
-          </a:prstGeom>
-          <a:noFill/>
-          <a:ln/>
-        </p:spPr>
-        <p:txBody>
-          <a:bodyPr wrap="square" rtlCol="0" anchor="ctr"/>
-          <a:lstStyle/>
-          <a:p>
-            <a:pPr algn="ctr" indent="0" marL="0">
-              <a:buNone/>
-            </a:pPr>
-            <a:r>
-              <a:rPr lang="en-US" sz="2000" b="1" dirty="0">
-                <a:solidFill>
-                  <a:srgbClr val="17132E"/>
-                </a:solidFill>
-                <a:latin typeface="Calibri" pitchFamily="34" charset="0"/>
-                <a:ea typeface="Calibri" pitchFamily="34" charset="-122"/>
-                <a:cs typeface="Calibri" pitchFamily="34" charset="-120"/>
-              </a:rPr>
-              <a:t>3</a:t>
-            </a:r>
-            <a:endParaRPr lang="en-US" sz="2000" dirty="0"/>
-          </a:p>
-        </p:txBody>
-      </p:sp>
-      <p:sp>
-        <p:nvSpPr>
-          <p:cNvPr id="17" name="Text 15"/>
-          <p:cNvSpPr/>
-          <p:nvPr/>
-        </p:nvSpPr>
-        <p:spPr>
-          <a:xfrm>
-            <a:off x="6370168" y="3429000"/>
-            <a:ext cx="2293544" cy="457200"/>
-          </a:xfrm>
-          <a:prstGeom prst="rect">
-            <a:avLst/>
-          </a:prstGeom>
-          <a:noFill/>
-          <a:ln/>
-        </p:spPr>
-        <p:txBody>
-          <a:bodyPr wrap="square" rtlCol="0" anchor="t"/>
-          <a:lstStyle/>
-          <a:p>
-            <a:pPr algn="ctr" indent="0" marL="0">
-              <a:buNone/>
-            </a:pPr>
-            <a:r>
-              <a:rPr lang="en-US" sz="1600" b="1" dirty="0">
-                <a:solidFill>
-                  <a:srgbClr val="FFFFFF"/>
-                </a:solidFill>
-                <a:latin typeface="Calibri" pitchFamily="34" charset="0"/>
-                <a:ea typeface="Calibri" pitchFamily="34" charset="-122"/>
-                <a:cs typeface="Calibri" pitchFamily="34" charset="-120"/>
-              </a:rPr>
-              <a:t>Параметры</a:t>
-            </a:r>
-            <a:endParaRPr lang="en-US" sz="1600" dirty="0"/>
-          </a:p>
-        </p:txBody>
-      </p:sp>
-      <p:sp>
-        <p:nvSpPr>
-          <p:cNvPr id="18" name="Text 16"/>
-          <p:cNvSpPr/>
-          <p:nvPr/>
-        </p:nvSpPr>
-        <p:spPr>
-          <a:xfrm>
-            <a:off x="6415888" y="3931920"/>
-            <a:ext cx="2202104" cy="822960"/>
-          </a:xfrm>
-          <a:prstGeom prst="rect">
-            <a:avLst/>
-          </a:prstGeom>
-          <a:noFill/>
-          <a:ln/>
-        </p:spPr>
-        <p:txBody>
-          <a:bodyPr wrap="square" rtlCol="0" anchor="t"/>
-          <a:lstStyle/>
-          <a:p>
-            <a:pPr algn="ctr" indent="0" marL="0">
-              <a:lnSpc>
-                <a:spcPct val="110000"/>
-              </a:lnSpc>
-              <a:buNone/>
-            </a:pPr>
-            <a:r>
-              <a:rPr lang="en-US" sz="1300" dirty="0">
-                <a:solidFill>
-                  <a:srgbClr val="D9D4F2"/>
-                </a:solidFill>
-                <a:latin typeface="Calibri" pitchFamily="34" charset="0"/>
-                <a:ea typeface="Calibri" pitchFamily="34" charset="-122"/>
-                <a:cs typeface="Calibri" pitchFamily="34" charset="-120"/>
-              </a:rPr>
-              <a:t>GridSearchCV</a:t>
-            </a:r>
-            <a:endParaRPr lang="en-US" sz="1300" dirty="0"/>
-          </a:p>
-        </p:txBody>
-      </p:sp>
-      <p:sp>
-        <p:nvSpPr>
-          <p:cNvPr id="19" name="Shape 17"/>
-          <p:cNvSpPr/>
-          <p:nvPr/>
-        </p:nvSpPr>
-        <p:spPr>
-          <a:xfrm>
-            <a:off x="9120911" y="2286000"/>
-            <a:ext cx="2476424" cy="2651760"/>
-          </a:xfrm>
-          <a:prstGeom prst="roundRect">
-            <a:avLst>
-              <a:gd name="adj" fmla="val 4431"/>
-            </a:avLst>
-          </a:prstGeom>
-          <a:solidFill>
-            <a:srgbClr val="241E42"/>
-          </a:solidFill>
-          <a:ln/>
-        </p:spPr>
-      </p:sp>
-      <p:sp>
-        <p:nvSpPr>
-          <p:cNvPr id="20" name="Shape 18"/>
-          <p:cNvSpPr/>
-          <p:nvPr/>
-        </p:nvSpPr>
-        <p:spPr>
-          <a:xfrm>
-            <a:off x="10039083" y="2560320"/>
-            <a:ext cx="640080" cy="640080"/>
-          </a:xfrm>
-          <a:prstGeom prst="ellipse">
-            <a:avLst/>
-          </a:prstGeom>
-          <a:solidFill>
-            <a:srgbClr val="2DD4BF"/>
-          </a:solidFill>
-          <a:ln/>
-        </p:spPr>
-      </p:sp>
-      <p:sp>
-        <p:nvSpPr>
-          <p:cNvPr id="21" name="Text 19"/>
-          <p:cNvSpPr/>
-          <p:nvPr/>
-        </p:nvSpPr>
-        <p:spPr>
-          <a:xfrm>
-            <a:off x="10039083" y="2560320"/>
-            <a:ext cx="640080" cy="640080"/>
-          </a:xfrm>
-          <a:prstGeom prst="rect">
-            <a:avLst/>
-          </a:prstGeom>
-          <a:noFill/>
-          <a:ln/>
-        </p:spPr>
-        <p:txBody>
-          <a:bodyPr wrap="square" rtlCol="0" anchor="ctr"/>
-          <a:lstStyle/>
-          <a:p>
-            <a:pPr algn="ctr" indent="0" marL="0">
-              <a:buNone/>
-            </a:pPr>
-            <a:r>
-              <a:rPr lang="en-US" sz="2000" b="1" dirty="0">
-                <a:solidFill>
-                  <a:srgbClr val="17132E"/>
-                </a:solidFill>
-                <a:latin typeface="Calibri" pitchFamily="34" charset="0"/>
-                <a:ea typeface="Calibri" pitchFamily="34" charset="-122"/>
-                <a:cs typeface="Calibri" pitchFamily="34" charset="-120"/>
-              </a:rPr>
-              <a:t>4</a:t>
-            </a:r>
-            <a:endParaRPr lang="en-US" sz="2000" dirty="0"/>
-          </a:p>
-        </p:txBody>
-      </p:sp>
-      <p:sp>
-        <p:nvSpPr>
-          <p:cNvPr id="22" name="Text 20"/>
-          <p:cNvSpPr/>
-          <p:nvPr/>
-        </p:nvSpPr>
-        <p:spPr>
-          <a:xfrm>
-            <a:off x="9212351" y="3429000"/>
-            <a:ext cx="2293544" cy="457200"/>
-          </a:xfrm>
-          <a:prstGeom prst="rect">
-            <a:avLst/>
-          </a:prstGeom>
-          <a:noFill/>
-          <a:ln/>
-        </p:spPr>
-        <p:txBody>
-          <a:bodyPr wrap="square" rtlCol="0" anchor="t"/>
-          <a:lstStyle/>
-          <a:p>
-            <a:pPr algn="ctr" indent="0" marL="0">
-              <a:buNone/>
-            </a:pPr>
-            <a:r>
-              <a:rPr lang="en-US" sz="1600" b="1" dirty="0">
-                <a:solidFill>
-                  <a:srgbClr val="FFFFFF"/>
-                </a:solidFill>
-                <a:latin typeface="Calibri" pitchFamily="34" charset="0"/>
-                <a:ea typeface="Calibri" pitchFamily="34" charset="-122"/>
-                <a:cs typeface="Calibri" pitchFamily="34" charset="-120"/>
-              </a:rPr>
-              <a:t>Метрика</a:t>
-            </a:r>
-            <a:endParaRPr lang="en-US" sz="1600" dirty="0"/>
-          </a:p>
-        </p:txBody>
-      </p:sp>
-      <p:sp>
-        <p:nvSpPr>
-          <p:cNvPr id="23" name="Text 21"/>
-          <p:cNvSpPr/>
-          <p:nvPr/>
-        </p:nvSpPr>
-        <p:spPr>
-          <a:xfrm>
-            <a:off x="9258071" y="3931920"/>
-            <a:ext cx="2202104" cy="822960"/>
-          </a:xfrm>
-          <a:prstGeom prst="rect">
-            <a:avLst/>
-          </a:prstGeom>
-          <a:noFill/>
-          <a:ln/>
-        </p:spPr>
-        <p:txBody>
-          <a:bodyPr wrap="square" rtlCol="0" anchor="t"/>
-          <a:lstStyle/>
-          <a:p>
-            <a:pPr algn="ctr" indent="0" marL="0">
-              <a:lnSpc>
-                <a:spcPct val="110000"/>
-              </a:lnSpc>
-              <a:buNone/>
-            </a:pPr>
-            <a:r>
-              <a:rPr lang="en-US" sz="1300" dirty="0">
-                <a:solidFill>
-                  <a:srgbClr val="D9D4F2"/>
-                </a:solidFill>
-                <a:latin typeface="Calibri" pitchFamily="34" charset="0"/>
-                <a:ea typeface="Calibri" pitchFamily="34" charset="-122"/>
-                <a:cs typeface="Calibri" pitchFamily="34" charset="-120"/>
-              </a:rPr>
-              <a:t>правильная (урок 11)</a:t>
-            </a:r>
-            <a:endParaRPr lang="en-US" sz="1300" dirty="0"/>
-          </a:p>
-        </p:txBody>
-      </p:sp>
-      <p:sp>
-        <p:nvSpPr>
-          <p:cNvPr id="24" name="Text 22"/>
-          <p:cNvSpPr/>
-          <p:nvPr/>
-        </p:nvSpPr>
-        <p:spPr>
-          <a:xfrm>
-            <a:off x="594360" y="5212080"/>
-            <a:ext cx="11002975" cy="457200"/>
-          </a:xfrm>
-          <a:prstGeom prst="rect">
-            <a:avLst/>
-          </a:prstGeom>
-          <a:noFill/>
-          <a:ln/>
-        </p:spPr>
-        <p:txBody>
-          <a:bodyPr wrap="square" rtlCol="0" anchor="t"/>
-          <a:lstStyle/>
-          <a:p>
-            <a:pPr algn="ctr" indent="0" marL="0">
-              <a:buNone/>
-            </a:pPr>
-            <a:r>
-              <a:rPr lang="en-US" sz="1700" i="1" dirty="0">
-                <a:solidFill>
-                  <a:srgbClr val="2DD4BF"/>
-                </a:solidFill>
-                <a:latin typeface="Calibri" pitchFamily="34" charset="0"/>
-                <a:ea typeface="Calibri" pitchFamily="34" charset="-122"/>
-                <a:cs typeface="Calibri" pitchFamily="34" charset="-120"/>
-              </a:rPr>
-              <a:t>Улучшение — это честно измерить метрику и понять, где модель ошибается.</a:t>
-            </a:r>
-            <a:endParaRPr lang="en-US" sz="1700" dirty="0"/>
-          </a:p>
-        </p:txBody>
-      </p:sp>
-      <p:sp>
-        <p:nvSpPr>
-          <p:cNvPr id="25" name="Text 23"/>
-          <p:cNvSpPr/>
-          <p:nvPr/>
-        </p:nvSpPr>
-        <p:spPr>
-          <a:xfrm>
-            <a:off x="10271455" y="6355080"/>
-            <a:ext cx="1371600" cy="274320"/>
-          </a:xfrm>
-          <a:prstGeom prst="rect">
-            <a:avLst/>
-          </a:prstGeom>
-          <a:noFill/>
-          <a:ln/>
-        </p:spPr>
-        <p:txBody>
-          <a:bodyPr wrap="square" rtlCol="0" anchor="t"/>
+              <a:t>витрина продукта — сайт, README, рассказ</a:t>
+            </a:r>
+            <a:endParaRPr lang="en-US" sz="1500" dirty="0"/>
+          </a:p>
+        </p:txBody>
+      </p:sp>
+      <p:sp>
+        <p:nvSpPr>
+          <p:cNvPr id="16" name="Text 11"/>
+          <p:cNvSpPr/>
+          <p:nvPr/>
+        </p:nvSpPr>
+        <p:spPr>
+          <a:xfrm>
+            <a:off x="640080" y="6172200"/>
+            <a:ext cx="10881360" cy="457200"/>
+          </a:xfrm>
+          <a:prstGeom prst="rect">
+            <a:avLst/>
+          </a:prstGeom>
+          <a:noFill/>
+          <a:ln/>
+        </p:spPr>
+        <p:txBody>
+          <a:bodyPr wrap="square" rtlCol="0" anchor="ctr"/>
+          <a:lstStyle/>
+          <a:p>
+            <a:pPr indent="0" marL="0">
+              <a:buNone/>
+            </a:pPr>
+            <a:r>
+              <a:rPr lang="en-US" sz="1400" i="1" dirty="0">
+                <a:solidFill>
+                  <a:srgbClr val="9E96C8"/>
+                </a:solidFill>
+                <a:latin typeface="Calibri" pitchFamily="34" charset="0"/>
+                <a:ea typeface="Calibri" pitchFamily="34" charset="-122"/>
+                <a:cs typeface="Calibri" pitchFamily="34" charset="-120"/>
+              </a:rPr>
+              <a:t>Это версия, которую ты покажешь родителям на Demo Day.</a:t>
+            </a:r>
+            <a:endParaRPr lang="en-US" sz="1400" dirty="0"/>
+          </a:p>
+        </p:txBody>
+      </p:sp>
+      <p:sp>
+        <p:nvSpPr>
+          <p:cNvPr id="17" name="Text 12"/>
+          <p:cNvSpPr/>
+          <p:nvPr/>
+        </p:nvSpPr>
+        <p:spPr>
+          <a:xfrm>
+            <a:off x="10698480" y="6309360"/>
+            <a:ext cx="1188720" cy="274320"/>
+          </a:xfrm>
+          <a:prstGeom prst="rect">
+            <a:avLst/>
+          </a:prstGeom>
+          <a:noFill/>
+          <a:ln/>
+        </p:spPr>
+        <p:txBody>
+          <a:bodyPr wrap="square" rtlCol="0" anchor="ctr"/>
           <a:lstStyle/>
           <a:p>
             <a:pPr algn="r" indent="0" marL="0">
@@ -2411,24 +2232,24 @@
         </p:nvSpPr>
         <p:spPr>
           <a:xfrm>
-            <a:off x="594360" y="457200"/>
-            <a:ext cx="11002975" cy="320040"/>
-          </a:xfrm>
-          <a:prstGeom prst="rect">
-            <a:avLst/>
-          </a:prstGeom>
-          <a:noFill/>
-          <a:ln/>
-        </p:spPr>
-        <p:txBody>
-          <a:bodyPr wrap="square" rtlCol="0" anchor="t"/>
+            <a:off x="640080" y="502920"/>
+            <a:ext cx="10058400" cy="365760"/>
+          </a:xfrm>
+          <a:prstGeom prst="rect">
+            <a:avLst/>
+          </a:prstGeom>
+          <a:noFill/>
+          <a:ln/>
+        </p:spPr>
+        <p:txBody>
+          <a:bodyPr wrap="square" rtlCol="0" anchor="ctr"/>
           <a:lstStyle/>
           <a:p>
             <a:pPr indent="0" marL="0">
               <a:buNone/>
             </a:pPr>
             <a:r>
-              <a:rPr lang="en-US" sz="1300" b="1" spc="200" kern="0" dirty="0">
+              <a:rPr lang="en-US" sz="1300" b="1" spc="300" kern="0" dirty="0">
                 <a:solidFill>
                   <a:srgbClr val="27D3EE"/>
                 </a:solidFill>
@@ -2436,7 +2257,7 @@
                 <a:ea typeface="Calibri" pitchFamily="34" charset="-122"/>
                 <a:cs typeface="Calibri" pitchFamily="34" charset="-120"/>
               </a:rPr>
-              <a:t>ПРОДУКТ</a:t>
+              <a:t>ЧТО ЗНАЧИТ «УЛУЧШИТЬ»</a:t>
             </a:r>
             <a:endParaRPr lang="en-US" sz="1300" dirty="0"/>
           </a:p>
@@ -2450,24 +2271,24 @@
         </p:nvSpPr>
         <p:spPr>
           <a:xfrm>
-            <a:off x="594360" y="749808"/>
-            <a:ext cx="11002975" cy="822960"/>
-          </a:xfrm>
-          <a:prstGeom prst="rect">
-            <a:avLst/>
-          </a:prstGeom>
-          <a:noFill/>
-          <a:ln/>
-        </p:spPr>
-        <p:txBody>
-          <a:bodyPr wrap="square" rtlCol="0" anchor="t"/>
+            <a:off x="640080" y="868680"/>
+            <a:ext cx="10058400" cy="640080"/>
+          </a:xfrm>
+          <a:prstGeom prst="rect">
+            <a:avLst/>
+          </a:prstGeom>
+          <a:noFill/>
+          <a:ln/>
+        </p:spPr>
+        <p:txBody>
+          <a:bodyPr wrap="square" rtlCol="0" anchor="ctr"/>
           <a:lstStyle/>
           <a:p>
             <a:pPr indent="0" marL="0">
               <a:buNone/>
             </a:pPr>
             <a:r>
-              <a:rPr lang="en-US" sz="3000" b="1" dirty="0">
+              <a:rPr lang="en-US" sz="3200" b="1" dirty="0">
                 <a:solidFill>
                   <a:srgbClr val="FFFFFF"/>
                 </a:solidFill>
@@ -2475,9 +2296,9 @@
                 <a:ea typeface="Calibri" pitchFamily="34" charset="-122"/>
                 <a:cs typeface="Calibri" pitchFamily="34" charset="-120"/>
               </a:rPr>
-              <a:t>Модель → веб-интерфейс</a:t>
-            </a:r>
-            <a:endParaRPr lang="en-US" sz="3000" dirty="0"/>
+              <a:t>Не 100%, а честно и лучше</a:t>
+            </a:r>
+            <a:endParaRPr lang="en-US" sz="3200" dirty="0"/>
           </a:p>
         </p:txBody>
       </p:sp>
@@ -2489,13 +2310,33 @@
         </p:nvSpPr>
         <p:spPr>
           <a:xfrm>
-            <a:off x="594360" y="2103120"/>
-            <a:ext cx="11002975" cy="1463040"/>
+            <a:off x="640080" y="1828800"/>
+            <a:ext cx="2606040" cy="3108960"/>
           </a:xfrm>
           <a:prstGeom prst="roundRect">
             <a:avLst>
-              <a:gd name="adj" fmla="val 7500"/>
+              <a:gd name="adj" fmla="val 4211"/>
             </a:avLst>
+          </a:prstGeom>
+          <a:solidFill>
+            <a:srgbClr val="241E42"/>
+          </a:solidFill>
+          <a:ln/>
+        </p:spPr>
+      </p:sp>
+      <p:sp>
+        <p:nvSpPr>
+          <p:cNvPr id="5" name="Shape 3"/>
+          <p:cNvSpPr/>
+          <p:nvPr/>
+        </p:nvSpPr>
+        <p:spPr>
+          <a:xfrm>
+            <a:off x="1394460" y="2148840"/>
+            <a:ext cx="1097280" cy="1097280"/>
+          </a:xfrm>
+          <a:prstGeom prst="ellipse">
+            <a:avLst/>
           </a:prstGeom>
           <a:solidFill>
             <a:srgbClr val="2C2552"/>
@@ -2503,32 +2344,56 @@
           <a:ln/>
         </p:spPr>
       </p:sp>
-      <p:sp>
-        <p:nvSpPr>
-          <p:cNvPr id="5" name="Text 3"/>
-          <p:cNvSpPr/>
-          <p:nvPr/>
-        </p:nvSpPr>
-        <p:spPr>
-          <a:xfrm>
-            <a:off x="960120" y="2286000"/>
-            <a:ext cx="10271455" cy="1097280"/>
-          </a:xfrm>
-          <a:prstGeom prst="rect">
-            <a:avLst/>
-          </a:prstGeom>
-          <a:noFill/>
-          <a:ln/>
-        </p:spPr>
-        <p:txBody>
-          <a:bodyPr wrap="square" rtlCol="0" anchor="ctr"/>
-          <a:lstStyle/>
-          <a:p>
-            <a:pPr indent="0" marL="0">
-              <a:buNone/>
-            </a:pPr>
-            <a:r>
-              <a:rPr lang="en-US" sz="2000" b="1" dirty="0">
+      <p:pic>
+        <p:nvPicPr>
+          <p:cNvPr id="6" name="Image 0" descr="preencoded.png">    </p:cNvPr>
+          <p:cNvPicPr>
+            <a:picLocks noChangeAspect="1"/>
+          </p:cNvPicPr>
+          <p:nvPr/>
+        </p:nvPicPr>
+        <p:blipFill>
+          <a:blip r:embed="rId1"/>
+          <a:stretch>
+            <a:fillRect/>
+          </a:stretch>
+        </p:blipFill>
+        <p:spPr>
+          <a:xfrm>
+            <a:off x="1595628" y="2350008"/>
+            <a:ext cx="694944" cy="694944"/>
+          </a:xfrm>
+          <a:prstGeom prst="rect">
+            <a:avLst/>
+          </a:prstGeom>
+        </p:spPr>
+      </p:pic>
+      <p:sp>
+        <p:nvSpPr>
+          <p:cNvPr id="7" name="Text 4"/>
+          <p:cNvSpPr/>
+          <p:nvPr/>
+        </p:nvSpPr>
+        <p:spPr>
+          <a:xfrm>
+            <a:off x="777240" y="3520440"/>
+            <a:ext cx="2331720" cy="548640"/>
+          </a:xfrm>
+          <a:prstGeom prst="rect">
+            <a:avLst/>
+          </a:prstGeom>
+          <a:noFill/>
+          <a:ln/>
+        </p:spPr>
+        <p:txBody>
+          <a:bodyPr wrap="square" rtlCol="0" anchor="ctr"/>
+          <a:lstStyle/>
+          <a:p>
+            <a:pPr algn="ctr" indent="0" marL="0">
+              <a:buNone/>
+            </a:pPr>
+            <a:r>
+              <a:rPr lang="en-US" sz="1800" b="1" dirty="0">
                 <a:solidFill>
                   <a:srgbClr val="FFFFFF"/>
                 </a:solidFill>
@@ -2536,26 +2401,65 @@
                 <a:ea typeface="Calibri" pitchFamily="34" charset="-122"/>
                 <a:cs typeface="Calibri" pitchFamily="34" charset="-120"/>
               </a:rPr>
-              <a:t>Оборачиваем модель в Gradio: пользователь вводит данные — получает предсказание.</a:t>
-            </a:r>
-            <a:endParaRPr lang="en-US" sz="2000" dirty="0"/>
-          </a:p>
-        </p:txBody>
-      </p:sp>
-      <p:sp>
-        <p:nvSpPr>
-          <p:cNvPr id="6" name="Shape 4"/>
-          <p:cNvSpPr/>
-          <p:nvPr/>
-        </p:nvSpPr>
-        <p:spPr>
-          <a:xfrm>
-            <a:off x="594360" y="3749040"/>
-            <a:ext cx="11002975" cy="2011680"/>
+              <a:t>1 · Другие модели</a:t>
+            </a:r>
+            <a:endParaRPr lang="en-US" sz="1800" dirty="0"/>
+          </a:p>
+        </p:txBody>
+      </p:sp>
+      <p:sp>
+        <p:nvSpPr>
+          <p:cNvPr id="8" name="Text 5"/>
+          <p:cNvSpPr/>
+          <p:nvPr/>
+        </p:nvSpPr>
+        <p:spPr>
+          <a:xfrm>
+            <a:off x="777240" y="4114800"/>
+            <a:ext cx="2331720" cy="548640"/>
+          </a:xfrm>
+          <a:prstGeom prst="rect">
+            <a:avLst/>
+          </a:prstGeom>
+          <a:noFill/>
+          <a:ln/>
+        </p:spPr>
+        <p:txBody>
+          <a:bodyPr wrap="square" rtlCol="0" anchor="ctr"/>
+          <a:lstStyle/>
+          <a:p>
+            <a:pPr algn="ctr" indent="0" marL="0">
+              <a:buNone/>
+            </a:pPr>
+            <a:r>
+              <a:rPr lang="en-US" sz="1400" dirty="0">
+                <a:solidFill>
+                  <a:srgbClr val="9E96C8"/>
+                </a:solidFill>
+                <a:latin typeface="Calibri" pitchFamily="34" charset="0"/>
+                <a:ea typeface="Calibri" pitchFamily="34" charset="-122"/>
+                <a:cs typeface="Calibri" pitchFamily="34" charset="-120"/>
+              </a:rPr>
+              <a:t>AutoML, бустинг</a:t>
+            </a:r>
+            <a:endParaRPr lang="en-US" sz="1400" dirty="0"/>
+          </a:p>
+        </p:txBody>
+      </p:sp>
+      <p:sp>
+        <p:nvSpPr>
+          <p:cNvPr id="9" name="Shape 6"/>
+          <p:cNvSpPr/>
+          <p:nvPr/>
+        </p:nvSpPr>
+        <p:spPr>
+          <a:xfrm>
+            <a:off x="3502152" y="1828800"/>
+            <a:ext cx="2606040" cy="3108960"/>
           </a:xfrm>
           <a:prstGeom prst="roundRect">
             <a:avLst>
-              <a:gd name="adj" fmla="val 5455"/>
+              <a:gd name="adj" fmla="val 4211"/>
             </a:avLst>
           </a:prstGeom>
           <a:solidFill>
@@ -2566,104 +2470,472 @@
       </p:sp>
       <p:sp>
         <p:nvSpPr>
-          <p:cNvPr id="7" name="Text 5"/>
-          <p:cNvSpPr/>
-          <p:nvPr/>
-        </p:nvSpPr>
-        <p:spPr>
-          <a:xfrm>
-            <a:off x="960120" y="4023360"/>
-            <a:ext cx="10271455" cy="548640"/>
-          </a:xfrm>
-          <a:prstGeom prst="rect">
-            <a:avLst/>
-          </a:prstGeom>
-          <a:noFill/>
-          <a:ln/>
-        </p:spPr>
-        <p:txBody>
-          <a:bodyPr wrap="square" rtlCol="0" anchor="t"/>
+          <p:cNvPr id="10" name="Shape 7"/>
+          <p:cNvSpPr/>
+          <p:nvPr/>
+        </p:nvSpPr>
+        <p:spPr>
+          <a:xfrm>
+            <a:off x="4256532" y="2148840"/>
+            <a:ext cx="1097280" cy="1097280"/>
+          </a:xfrm>
+          <a:prstGeom prst="ellipse">
+            <a:avLst/>
+          </a:prstGeom>
+          <a:solidFill>
+            <a:srgbClr val="2C2552"/>
+          </a:solidFill>
+          <a:ln/>
+        </p:spPr>
+      </p:sp>
+      <p:pic>
+        <p:nvPicPr>
+          <p:cNvPr id="11" name="Image 1" descr="preencoded.png">    </p:cNvPr>
+          <p:cNvPicPr>
+            <a:picLocks noChangeAspect="1"/>
+          </p:cNvPicPr>
+          <p:nvPr/>
+        </p:nvPicPr>
+        <p:blipFill>
+          <a:blip r:embed="rId2"/>
+          <a:stretch>
+            <a:fillRect/>
+          </a:stretch>
+        </p:blipFill>
+        <p:spPr>
+          <a:xfrm>
+            <a:off x="4457700" y="2350008"/>
+            <a:ext cx="694944" cy="694944"/>
+          </a:xfrm>
+          <a:prstGeom prst="rect">
+            <a:avLst/>
+          </a:prstGeom>
+        </p:spPr>
+      </p:pic>
+      <p:sp>
+        <p:nvSpPr>
+          <p:cNvPr id="12" name="Text 8"/>
+          <p:cNvSpPr/>
+          <p:nvPr/>
+        </p:nvSpPr>
+        <p:spPr>
+          <a:xfrm>
+            <a:off x="3639312" y="3520440"/>
+            <a:ext cx="2331720" cy="548640"/>
+          </a:xfrm>
+          <a:prstGeom prst="rect">
+            <a:avLst/>
+          </a:prstGeom>
+          <a:noFill/>
+          <a:ln/>
+        </p:spPr>
+        <p:txBody>
+          <a:bodyPr wrap="square" rtlCol="0" anchor="ctr"/>
+          <a:lstStyle/>
+          <a:p>
+            <a:pPr algn="ctr" indent="0" marL="0">
+              <a:buNone/>
+            </a:pPr>
+            <a:r>
+              <a:rPr lang="en-US" sz="1800" b="1" dirty="0">
+                <a:solidFill>
+                  <a:srgbClr val="FFFFFF"/>
+                </a:solidFill>
+                <a:latin typeface="Calibri" pitchFamily="34" charset="0"/>
+                <a:ea typeface="Calibri" pitchFamily="34" charset="-122"/>
+                <a:cs typeface="Calibri" pitchFamily="34" charset="-120"/>
+              </a:rPr>
+              <a:t>2 · Признаки</a:t>
+            </a:r>
+            <a:endParaRPr lang="en-US" sz="1800" dirty="0"/>
+          </a:p>
+        </p:txBody>
+      </p:sp>
+      <p:sp>
+        <p:nvSpPr>
+          <p:cNvPr id="13" name="Text 9"/>
+          <p:cNvSpPr/>
+          <p:nvPr/>
+        </p:nvSpPr>
+        <p:spPr>
+          <a:xfrm>
+            <a:off x="3639312" y="4114800"/>
+            <a:ext cx="2331720" cy="548640"/>
+          </a:xfrm>
+          <a:prstGeom prst="rect">
+            <a:avLst/>
+          </a:prstGeom>
+          <a:noFill/>
+          <a:ln/>
+        </p:spPr>
+        <p:txBody>
+          <a:bodyPr wrap="square" rtlCol="0" anchor="ctr"/>
+          <a:lstStyle/>
+          <a:p>
+            <a:pPr algn="ctr" indent="0" marL="0">
+              <a:buNone/>
+            </a:pPr>
+            <a:r>
+              <a:rPr lang="en-US" sz="1400" dirty="0">
+                <a:solidFill>
+                  <a:srgbClr val="9E96C8"/>
+                </a:solidFill>
+                <a:latin typeface="Calibri" pitchFamily="34" charset="0"/>
+                <a:ea typeface="Calibri" pitchFamily="34" charset="-122"/>
+                <a:cs typeface="Calibri" pitchFamily="34" charset="-120"/>
+              </a:rPr>
+              <a:t>новые, продуманные</a:t>
+            </a:r>
+            <a:endParaRPr lang="en-US" sz="1400" dirty="0"/>
+          </a:p>
+        </p:txBody>
+      </p:sp>
+      <p:sp>
+        <p:nvSpPr>
+          <p:cNvPr id="14" name="Shape 10"/>
+          <p:cNvSpPr/>
+          <p:nvPr/>
+        </p:nvSpPr>
+        <p:spPr>
+          <a:xfrm>
+            <a:off x="6364224" y="1828800"/>
+            <a:ext cx="2606040" cy="3108960"/>
+          </a:xfrm>
+          <a:prstGeom prst="roundRect">
+            <a:avLst>
+              <a:gd name="adj" fmla="val 4211"/>
+            </a:avLst>
+          </a:prstGeom>
+          <a:solidFill>
+            <a:srgbClr val="241E42"/>
+          </a:solidFill>
+          <a:ln/>
+        </p:spPr>
+      </p:sp>
+      <p:sp>
+        <p:nvSpPr>
+          <p:cNvPr id="15" name="Shape 11"/>
+          <p:cNvSpPr/>
+          <p:nvPr/>
+        </p:nvSpPr>
+        <p:spPr>
+          <a:xfrm>
+            <a:off x="7118604" y="2148840"/>
+            <a:ext cx="1097280" cy="1097280"/>
+          </a:xfrm>
+          <a:prstGeom prst="ellipse">
+            <a:avLst/>
+          </a:prstGeom>
+          <a:solidFill>
+            <a:srgbClr val="2C2552"/>
+          </a:solidFill>
+          <a:ln/>
+        </p:spPr>
+      </p:sp>
+      <p:pic>
+        <p:nvPicPr>
+          <p:cNvPr id="16" name="Image 2" descr="preencoded.png">    </p:cNvPr>
+          <p:cNvPicPr>
+            <a:picLocks noChangeAspect="1"/>
+          </p:cNvPicPr>
+          <p:nvPr/>
+        </p:nvPicPr>
+        <p:blipFill>
+          <a:blip r:embed="rId3"/>
+          <a:stretch>
+            <a:fillRect/>
+          </a:stretch>
+        </p:blipFill>
+        <p:spPr>
+          <a:xfrm>
+            <a:off x="7319772" y="2350008"/>
+            <a:ext cx="694944" cy="694944"/>
+          </a:xfrm>
+          <a:prstGeom prst="rect">
+            <a:avLst/>
+          </a:prstGeom>
+        </p:spPr>
+      </p:pic>
+      <p:sp>
+        <p:nvSpPr>
+          <p:cNvPr id="17" name="Text 12"/>
+          <p:cNvSpPr/>
+          <p:nvPr/>
+        </p:nvSpPr>
+        <p:spPr>
+          <a:xfrm>
+            <a:off x="6501384" y="3520440"/>
+            <a:ext cx="2331720" cy="548640"/>
+          </a:xfrm>
+          <a:prstGeom prst="rect">
+            <a:avLst/>
+          </a:prstGeom>
+          <a:noFill/>
+          <a:ln/>
+        </p:spPr>
+        <p:txBody>
+          <a:bodyPr wrap="square" rtlCol="0" anchor="ctr"/>
+          <a:lstStyle/>
+          <a:p>
+            <a:pPr algn="ctr" indent="0" marL="0">
+              <a:buNone/>
+            </a:pPr>
+            <a:r>
+              <a:rPr lang="en-US" sz="1800" b="1" dirty="0">
+                <a:solidFill>
+                  <a:srgbClr val="FFFFFF"/>
+                </a:solidFill>
+                <a:latin typeface="Calibri" pitchFamily="34" charset="0"/>
+                <a:ea typeface="Calibri" pitchFamily="34" charset="-122"/>
+                <a:cs typeface="Calibri" pitchFamily="34" charset="-120"/>
+              </a:rPr>
+              <a:t>3 · Параметры</a:t>
+            </a:r>
+            <a:endParaRPr lang="en-US" sz="1800" dirty="0"/>
+          </a:p>
+        </p:txBody>
+      </p:sp>
+      <p:sp>
+        <p:nvSpPr>
+          <p:cNvPr id="18" name="Text 13"/>
+          <p:cNvSpPr/>
+          <p:nvPr/>
+        </p:nvSpPr>
+        <p:spPr>
+          <a:xfrm>
+            <a:off x="6501384" y="4114800"/>
+            <a:ext cx="2331720" cy="548640"/>
+          </a:xfrm>
+          <a:prstGeom prst="rect">
+            <a:avLst/>
+          </a:prstGeom>
+          <a:noFill/>
+          <a:ln/>
+        </p:spPr>
+        <p:txBody>
+          <a:bodyPr wrap="square" rtlCol="0" anchor="ctr"/>
+          <a:lstStyle/>
+          <a:p>
+            <a:pPr algn="ctr" indent="0" marL="0">
+              <a:buNone/>
+            </a:pPr>
+            <a:r>
+              <a:rPr lang="en-US" sz="1400" dirty="0">
+                <a:solidFill>
+                  <a:srgbClr val="9E96C8"/>
+                </a:solidFill>
+                <a:latin typeface="Calibri" pitchFamily="34" charset="0"/>
+                <a:ea typeface="Calibri" pitchFamily="34" charset="-122"/>
+                <a:cs typeface="Calibri" pitchFamily="34" charset="-120"/>
+              </a:rPr>
+              <a:t>GridSearchCV</a:t>
+            </a:r>
+            <a:endParaRPr lang="en-US" sz="1400" dirty="0"/>
+          </a:p>
+        </p:txBody>
+      </p:sp>
+      <p:sp>
+        <p:nvSpPr>
+          <p:cNvPr id="19" name="Shape 14"/>
+          <p:cNvSpPr/>
+          <p:nvPr/>
+        </p:nvSpPr>
+        <p:spPr>
+          <a:xfrm>
+            <a:off x="9226296" y="1828800"/>
+            <a:ext cx="2606040" cy="3108960"/>
+          </a:xfrm>
+          <a:prstGeom prst="roundRect">
+            <a:avLst>
+              <a:gd name="adj" fmla="val 4211"/>
+            </a:avLst>
+          </a:prstGeom>
+          <a:solidFill>
+            <a:srgbClr val="241E42"/>
+          </a:solidFill>
+          <a:ln/>
+        </p:spPr>
+      </p:sp>
+      <p:sp>
+        <p:nvSpPr>
+          <p:cNvPr id="20" name="Shape 15"/>
+          <p:cNvSpPr/>
+          <p:nvPr/>
+        </p:nvSpPr>
+        <p:spPr>
+          <a:xfrm>
+            <a:off x="9980676" y="2148840"/>
+            <a:ext cx="1097280" cy="1097280"/>
+          </a:xfrm>
+          <a:prstGeom prst="ellipse">
+            <a:avLst/>
+          </a:prstGeom>
+          <a:solidFill>
+            <a:srgbClr val="2C2552"/>
+          </a:solidFill>
+          <a:ln/>
+        </p:spPr>
+      </p:sp>
+      <p:pic>
+        <p:nvPicPr>
+          <p:cNvPr id="21" name="Image 3" descr="preencoded.png">    </p:cNvPr>
+          <p:cNvPicPr>
+            <a:picLocks noChangeAspect="1"/>
+          </p:cNvPicPr>
+          <p:nvPr/>
+        </p:nvPicPr>
+        <p:blipFill>
+          <a:blip r:embed="rId4"/>
+          <a:stretch>
+            <a:fillRect/>
+          </a:stretch>
+        </p:blipFill>
+        <p:spPr>
+          <a:xfrm>
+            <a:off x="10181844" y="2350008"/>
+            <a:ext cx="694944" cy="694944"/>
+          </a:xfrm>
+          <a:prstGeom prst="rect">
+            <a:avLst/>
+          </a:prstGeom>
+        </p:spPr>
+      </p:pic>
+      <p:sp>
+        <p:nvSpPr>
+          <p:cNvPr id="22" name="Text 16"/>
+          <p:cNvSpPr/>
+          <p:nvPr/>
+        </p:nvSpPr>
+        <p:spPr>
+          <a:xfrm>
+            <a:off x="9363456" y="3520440"/>
+            <a:ext cx="2331720" cy="548640"/>
+          </a:xfrm>
+          <a:prstGeom prst="rect">
+            <a:avLst/>
+          </a:prstGeom>
+          <a:noFill/>
+          <a:ln/>
+        </p:spPr>
+        <p:txBody>
+          <a:bodyPr wrap="square" rtlCol="0" anchor="ctr"/>
+          <a:lstStyle/>
+          <a:p>
+            <a:pPr algn="ctr" indent="0" marL="0">
+              <a:buNone/>
+            </a:pPr>
+            <a:r>
+              <a:rPr lang="en-US" sz="1800" b="1" dirty="0">
+                <a:solidFill>
+                  <a:srgbClr val="FFFFFF"/>
+                </a:solidFill>
+                <a:latin typeface="Calibri" pitchFamily="34" charset="0"/>
+                <a:ea typeface="Calibri" pitchFamily="34" charset="-122"/>
+                <a:cs typeface="Calibri" pitchFamily="34" charset="-120"/>
+              </a:rPr>
+              <a:t>4 · Метрика</a:t>
+            </a:r>
+            <a:endParaRPr lang="en-US" sz="1800" dirty="0"/>
+          </a:p>
+        </p:txBody>
+      </p:sp>
+      <p:sp>
+        <p:nvSpPr>
+          <p:cNvPr id="23" name="Text 17"/>
+          <p:cNvSpPr/>
+          <p:nvPr/>
+        </p:nvSpPr>
+        <p:spPr>
+          <a:xfrm>
+            <a:off x="9363456" y="4114800"/>
+            <a:ext cx="2331720" cy="548640"/>
+          </a:xfrm>
+          <a:prstGeom prst="rect">
+            <a:avLst/>
+          </a:prstGeom>
+          <a:noFill/>
+          <a:ln/>
+        </p:spPr>
+        <p:txBody>
+          <a:bodyPr wrap="square" rtlCol="0" anchor="ctr"/>
+          <a:lstStyle/>
+          <a:p>
+            <a:pPr algn="ctr" indent="0" marL="0">
+              <a:buNone/>
+            </a:pPr>
+            <a:r>
+              <a:rPr lang="en-US" sz="1400" dirty="0">
+                <a:solidFill>
+                  <a:srgbClr val="9E96C8"/>
+                </a:solidFill>
+                <a:latin typeface="Calibri" pitchFamily="34" charset="0"/>
+                <a:ea typeface="Calibri" pitchFamily="34" charset="-122"/>
+                <a:cs typeface="Calibri" pitchFamily="34" charset="-120"/>
+              </a:rPr>
+              <a:t>правильная (урок 11)</a:t>
+            </a:r>
+            <a:endParaRPr lang="en-US" sz="1400" dirty="0"/>
+          </a:p>
+        </p:txBody>
+      </p:sp>
+      <p:sp>
+        <p:nvSpPr>
+          <p:cNvPr id="24" name="Text 18"/>
+          <p:cNvSpPr/>
+          <p:nvPr/>
+        </p:nvSpPr>
+        <p:spPr>
+          <a:xfrm>
+            <a:off x="640080" y="6172200"/>
+            <a:ext cx="10881360" cy="457200"/>
+          </a:xfrm>
+          <a:prstGeom prst="rect">
+            <a:avLst/>
+          </a:prstGeom>
+          <a:noFill/>
+          <a:ln/>
+        </p:spPr>
+        <p:txBody>
+          <a:bodyPr wrap="square" rtlCol="0" anchor="ctr"/>
           <a:lstStyle/>
           <a:p>
             <a:pPr indent="0" marL="0">
               <a:buNone/>
             </a:pPr>
             <a:r>
-              <a:rPr lang="en-US" sz="1500" dirty="0">
-                <a:solidFill>
-                  <a:srgbClr val="D9D4F2"/>
-                </a:solidFill>
-                <a:latin typeface="Consolas" pitchFamily="34" charset="0"/>
-                <a:ea typeface="Consolas" pitchFamily="34" charset="-122"/>
-                <a:cs typeface="Consolas" pitchFamily="34" charset="-120"/>
-              </a:rPr>
-              <a:t>gr.Interface(fn=predict, inputs=[...], outputs=gr.Label()).launch(share=True)</a:t>
-            </a:r>
-            <a:endParaRPr lang="en-US" sz="1500" dirty="0"/>
-          </a:p>
-        </p:txBody>
-      </p:sp>
-      <p:sp>
-        <p:nvSpPr>
-          <p:cNvPr id="8" name="Text 6"/>
-          <p:cNvSpPr/>
-          <p:nvPr/>
-        </p:nvSpPr>
-        <p:spPr>
-          <a:xfrm>
-            <a:off x="960120" y="4754880"/>
-            <a:ext cx="10271455" cy="822960"/>
-          </a:xfrm>
-          <a:prstGeom prst="rect">
-            <a:avLst/>
-          </a:prstGeom>
-          <a:noFill/>
-          <a:ln/>
-        </p:spPr>
-        <p:txBody>
-          <a:bodyPr wrap="square" rtlCol="0" anchor="t"/>
-          <a:lstStyle/>
-          <a:p>
-            <a:pPr indent="0" marL="0">
-              <a:lnSpc>
-                <a:spcPct val="115000"/>
-              </a:lnSpc>
-              <a:buNone/>
-            </a:pPr>
-            <a:r>
-              <a:rPr lang="en-US" sz="1600" i="1" dirty="0">
-                <a:solidFill>
-                  <a:srgbClr val="2DD4BF"/>
-                </a:solidFill>
-                <a:latin typeface="Calibri" pitchFamily="34" charset="0"/>
-                <a:ea typeface="Calibri" pitchFamily="34" charset="-122"/>
-                <a:cs typeface="Calibri" pitchFamily="34" charset="-120"/>
-              </a:rPr>
-              <a:t>Важно: интерфейс принимает данные в том же формате, что ждёт модель. Проверь на новых примерах.</a:t>
-            </a:r>
-            <a:endParaRPr lang="en-US" sz="1600" dirty="0"/>
-          </a:p>
-        </p:txBody>
-      </p:sp>
-      <p:sp>
-        <p:nvSpPr>
-          <p:cNvPr id="9" name="Text 7"/>
-          <p:cNvSpPr/>
-          <p:nvPr/>
-        </p:nvSpPr>
-        <p:spPr>
-          <a:xfrm>
-            <a:off x="10271455" y="6355080"/>
-            <a:ext cx="1371600" cy="274320"/>
-          </a:xfrm>
-          <a:prstGeom prst="rect">
-            <a:avLst/>
-          </a:prstGeom>
-          <a:noFill/>
-          <a:ln/>
-        </p:spPr>
-        <p:txBody>
-          <a:bodyPr wrap="square" rtlCol="0" anchor="t"/>
+              <a:rPr lang="en-US" sz="1400" i="1" dirty="0">
+                <a:solidFill>
+                  <a:srgbClr val="9E96C8"/>
+                </a:solidFill>
+                <a:latin typeface="Calibri" pitchFamily="34" charset="0"/>
+                <a:ea typeface="Calibri" pitchFamily="34" charset="-122"/>
+                <a:cs typeface="Calibri" pitchFamily="34" charset="-120"/>
+              </a:rPr>
+              <a:t>Улучшение — честно измерить метрику и понять, где модель ошибается.</a:t>
+            </a:r>
+            <a:endParaRPr lang="en-US" sz="1400" dirty="0"/>
+          </a:p>
+        </p:txBody>
+      </p:sp>
+      <p:sp>
+        <p:nvSpPr>
+          <p:cNvPr id="25" name="Text 19"/>
+          <p:cNvSpPr/>
+          <p:nvPr/>
+        </p:nvSpPr>
+        <p:spPr>
+          <a:xfrm>
+            <a:off x="10698480" y="6309360"/>
+            <a:ext cx="1188720" cy="274320"/>
+          </a:xfrm>
+          <a:prstGeom prst="rect">
+            <a:avLst/>
+          </a:prstGeom>
+          <a:noFill/>
+          <a:ln/>
+        </p:spPr>
+        <p:txBody>
+          <a:bodyPr wrap="square" rtlCol="0" anchor="ctr"/>
           <a:lstStyle/>
           <a:p>
             <a:pPr algn="r" indent="0" marL="0">
@@ -2724,32 +2996,32 @@
         </p:nvSpPr>
         <p:spPr>
           <a:xfrm>
-            <a:off x="594360" y="457200"/>
-            <a:ext cx="11002975" cy="320040"/>
-          </a:xfrm>
-          <a:prstGeom prst="rect">
-            <a:avLst/>
-          </a:prstGeom>
-          <a:noFill/>
-          <a:ln/>
-        </p:spPr>
-        <p:txBody>
-          <a:bodyPr wrap="square" rtlCol="0" anchor="t"/>
+            <a:off x="640080" y="502920"/>
+            <a:ext cx="10058400" cy="365760"/>
+          </a:xfrm>
+          <a:prstGeom prst="rect">
+            <a:avLst/>
+          </a:prstGeom>
+          <a:noFill/>
+          <a:ln/>
+        </p:spPr>
+        <p:txBody>
+          <a:bodyPr wrap="square" rtlCol="0" anchor="ctr"/>
           <a:lstStyle/>
           <a:p>
             <a:pPr indent="0" marL="0">
               <a:buNone/>
             </a:pPr>
             <a:r>
-              <a:rPr lang="en-US" sz="1300" b="1" spc="200" kern="0" dirty="0">
-                <a:solidFill>
-                  <a:srgbClr val="27D3EE"/>
-                </a:solidFill>
-                <a:latin typeface="Calibri" pitchFamily="34" charset="0"/>
-                <a:ea typeface="Calibri" pitchFamily="34" charset="-122"/>
-                <a:cs typeface="Calibri" pitchFamily="34" charset="-120"/>
-              </a:rPr>
-              <a:t>РАССКАЗ</a:t>
+              <a:rPr lang="en-US" sz="1300" b="1" spc="300" kern="0" dirty="0">
+                <a:solidFill>
+                  <a:srgbClr val="2DD4BF"/>
+                </a:solidFill>
+                <a:latin typeface="Calibri" pitchFamily="34" charset="0"/>
+                <a:ea typeface="Calibri" pitchFamily="34" charset="-122"/>
+                <a:cs typeface="Calibri" pitchFamily="34" charset="-120"/>
+              </a:rPr>
+              <a:t>УЛУЧШЕНИЕ НА ПРАКТИКЕ</a:t>
             </a:r>
             <a:endParaRPr lang="en-US" sz="1300" dirty="0"/>
           </a:p>
@@ -2763,17 +3035,17 @@
         </p:nvSpPr>
         <p:spPr>
           <a:xfrm>
-            <a:off x="594360" y="749808"/>
-            <a:ext cx="11002975" cy="822960"/>
-          </a:xfrm>
-          <a:prstGeom prst="rect">
-            <a:avLst/>
-          </a:prstGeom>
-          <a:noFill/>
-          <a:ln/>
-        </p:spPr>
-        <p:txBody>
-          <a:bodyPr wrap="square" rtlCol="0" anchor="t"/>
+            <a:off x="640080" y="868680"/>
+            <a:ext cx="10972800" cy="640080"/>
+          </a:xfrm>
+          <a:prstGeom prst="rect">
+            <a:avLst/>
+          </a:prstGeom>
+          <a:noFill/>
+          <a:ln/>
+        </p:spPr>
+        <p:txBody>
+          <a:bodyPr wrap="square" rtlCol="0" anchor="ctr"/>
           <a:lstStyle/>
           <a:p>
             <a:pPr indent="0" marL="0">
@@ -2788,7 +3060,7 @@
                 <a:ea typeface="Calibri" pitchFamily="34" charset="-122"/>
                 <a:cs typeface="Calibri" pitchFamily="34" charset="-120"/>
               </a:rPr>
-              <a:t>Структура презентации и README</a:t>
+              <a:t>До и после: покажи, что модель растёт</a:t>
             </a:r>
             <a:endParaRPr lang="en-US" sz="3000" dirty="0"/>
           </a:p>
@@ -2802,12 +3074,295 @@
         </p:nvSpPr>
         <p:spPr>
           <a:xfrm>
-            <a:off x="594360" y="2103120"/>
-            <a:ext cx="5577840" cy="3657600"/>
+            <a:off x="822960" y="1828800"/>
+            <a:ext cx="4206240" cy="1737360"/>
           </a:xfrm>
           <a:prstGeom prst="roundRect">
             <a:avLst>
-              <a:gd name="adj" fmla="val 3000"/>
+              <a:gd name="adj" fmla="val 6316"/>
+            </a:avLst>
+          </a:prstGeom>
+          <a:solidFill>
+            <a:srgbClr val="241E42"/>
+          </a:solidFill>
+          <a:ln/>
+        </p:spPr>
+      </p:sp>
+      <p:sp>
+        <p:nvSpPr>
+          <p:cNvPr id="5" name="Text 3"/>
+          <p:cNvSpPr/>
+          <p:nvPr/>
+        </p:nvSpPr>
+        <p:spPr>
+          <a:xfrm>
+            <a:off x="822960" y="2011680"/>
+            <a:ext cx="4206240" cy="457200"/>
+          </a:xfrm>
+          <a:prstGeom prst="rect">
+            <a:avLst/>
+          </a:prstGeom>
+          <a:noFill/>
+          <a:ln/>
+        </p:spPr>
+        <p:txBody>
+          <a:bodyPr wrap="square" rtlCol="0" anchor="ctr"/>
+          <a:lstStyle/>
+          <a:p>
+            <a:pPr algn="ctr" indent="0" marL="0">
+              <a:buNone/>
+            </a:pPr>
+            <a:r>
+              <a:rPr lang="en-US" sz="1600" b="1" dirty="0">
+                <a:solidFill>
+                  <a:srgbClr val="9E96C8"/>
+                </a:solidFill>
+                <a:latin typeface="Calibri" pitchFamily="34" charset="0"/>
+                <a:ea typeface="Calibri" pitchFamily="34" charset="-122"/>
+                <a:cs typeface="Calibri" pitchFamily="34" charset="-120"/>
+              </a:rPr>
+              <a:t>ДО · baseline</a:t>
+            </a:r>
+            <a:endParaRPr lang="en-US" sz="1600" dirty="0"/>
+          </a:p>
+        </p:txBody>
+      </p:sp>
+      <p:sp>
+        <p:nvSpPr>
+          <p:cNvPr id="6" name="Text 4"/>
+          <p:cNvSpPr/>
+          <p:nvPr/>
+        </p:nvSpPr>
+        <p:spPr>
+          <a:xfrm>
+            <a:off x="822960" y="2377440"/>
+            <a:ext cx="4206240" cy="1005840"/>
+          </a:xfrm>
+          <a:prstGeom prst="rect">
+            <a:avLst/>
+          </a:prstGeom>
+          <a:noFill/>
+          <a:ln/>
+        </p:spPr>
+        <p:txBody>
+          <a:bodyPr wrap="square" rtlCol="0" anchor="ctr"/>
+          <a:lstStyle/>
+          <a:p>
+            <a:pPr algn="ctr" indent="0" marL="0">
+              <a:buNone/>
+            </a:pPr>
+            <a:r>
+              <a:rPr lang="en-US" sz="5600" b="1" dirty="0">
+                <a:solidFill>
+                  <a:srgbClr val="FF7A8A"/>
+                </a:solidFill>
+                <a:latin typeface="Calibri" pitchFamily="34" charset="0"/>
+                <a:ea typeface="Calibri" pitchFamily="34" charset="-122"/>
+                <a:cs typeface="Calibri" pitchFamily="34" charset="-120"/>
+              </a:rPr>
+              <a:t>43%</a:t>
+            </a:r>
+            <a:endParaRPr lang="en-US" sz="5600" dirty="0"/>
+          </a:p>
+        </p:txBody>
+      </p:sp>
+      <p:sp>
+        <p:nvSpPr>
+          <p:cNvPr id="7" name="Text 5"/>
+          <p:cNvSpPr/>
+          <p:nvPr/>
+        </p:nvSpPr>
+        <p:spPr>
+          <a:xfrm>
+            <a:off x="5074920" y="2377440"/>
+            <a:ext cx="1097280" cy="1005840"/>
+          </a:xfrm>
+          <a:prstGeom prst="rect">
+            <a:avLst/>
+          </a:prstGeom>
+          <a:noFill/>
+          <a:ln/>
+        </p:spPr>
+        <p:txBody>
+          <a:bodyPr wrap="square" rtlCol="0" anchor="ctr"/>
+          <a:lstStyle/>
+          <a:p>
+            <a:pPr algn="ctr" indent="0" marL="0">
+              <a:buNone/>
+            </a:pPr>
+            <a:r>
+              <a:rPr lang="en-US" sz="4400" b="1" dirty="0">
+                <a:solidFill>
+                  <a:srgbClr val="9E96C8"/>
+                </a:solidFill>
+                <a:latin typeface="Calibri" pitchFamily="34" charset="0"/>
+                <a:ea typeface="Calibri" pitchFamily="34" charset="-122"/>
+                <a:cs typeface="Calibri" pitchFamily="34" charset="-120"/>
+              </a:rPr>
+              <a:t>→</a:t>
+            </a:r>
+            <a:endParaRPr lang="en-US" sz="4400" dirty="0"/>
+          </a:p>
+        </p:txBody>
+      </p:sp>
+      <p:sp>
+        <p:nvSpPr>
+          <p:cNvPr id="8" name="Shape 6"/>
+          <p:cNvSpPr/>
+          <p:nvPr/>
+        </p:nvSpPr>
+        <p:spPr>
+          <a:xfrm>
+            <a:off x="6217920" y="1828800"/>
+            <a:ext cx="4206240" cy="1737360"/>
+          </a:xfrm>
+          <a:prstGeom prst="roundRect">
+            <a:avLst>
+              <a:gd name="adj" fmla="val 6316"/>
+            </a:avLst>
+          </a:prstGeom>
+          <a:solidFill>
+            <a:srgbClr val="241E42"/>
+          </a:solidFill>
+          <a:ln w="19050">
+            <a:solidFill>
+              <a:srgbClr val="2DD4BF"/>
+            </a:solidFill>
+            <a:prstDash val="solid"/>
+          </a:ln>
+        </p:spPr>
+      </p:sp>
+      <p:sp>
+        <p:nvSpPr>
+          <p:cNvPr id="9" name="Text 7"/>
+          <p:cNvSpPr/>
+          <p:nvPr/>
+        </p:nvSpPr>
+        <p:spPr>
+          <a:xfrm>
+            <a:off x="6217920" y="2011680"/>
+            <a:ext cx="4206240" cy="457200"/>
+          </a:xfrm>
+          <a:prstGeom prst="rect">
+            <a:avLst/>
+          </a:prstGeom>
+          <a:noFill/>
+          <a:ln/>
+        </p:spPr>
+        <p:txBody>
+          <a:bodyPr wrap="square" rtlCol="0" anchor="ctr"/>
+          <a:lstStyle/>
+          <a:p>
+            <a:pPr algn="ctr" indent="0" marL="0">
+              <a:buNone/>
+            </a:pPr>
+            <a:r>
+              <a:rPr lang="en-US" sz="1500" b="1" dirty="0">
+                <a:solidFill>
+                  <a:srgbClr val="D9D4F2"/>
+                </a:solidFill>
+                <a:latin typeface="Calibri" pitchFamily="34" charset="0"/>
+                <a:ea typeface="Calibri" pitchFamily="34" charset="-122"/>
+                <a:cs typeface="Calibri" pitchFamily="34" charset="-120"/>
+              </a:rPr>
+              <a:t>ПОСЛЕ · твоя модель в Pipeline</a:t>
+            </a:r>
+            <a:endParaRPr lang="en-US" sz="1500" dirty="0"/>
+          </a:p>
+        </p:txBody>
+      </p:sp>
+      <p:sp>
+        <p:nvSpPr>
+          <p:cNvPr id="10" name="Text 8"/>
+          <p:cNvSpPr/>
+          <p:nvPr/>
+        </p:nvSpPr>
+        <p:spPr>
+          <a:xfrm>
+            <a:off x="6217920" y="2377440"/>
+            <a:ext cx="4206240" cy="1005840"/>
+          </a:xfrm>
+          <a:prstGeom prst="rect">
+            <a:avLst/>
+          </a:prstGeom>
+          <a:noFill/>
+          <a:ln/>
+        </p:spPr>
+        <p:txBody>
+          <a:bodyPr wrap="square" rtlCol="0" anchor="ctr"/>
+          <a:lstStyle/>
+          <a:p>
+            <a:pPr algn="ctr" indent="0" marL="0">
+              <a:buNone/>
+            </a:pPr>
+            <a:r>
+              <a:rPr lang="en-US" sz="5600" b="1" dirty="0">
+                <a:solidFill>
+                  <a:srgbClr val="6EE7B7"/>
+                </a:solidFill>
+                <a:latin typeface="Calibri" pitchFamily="34" charset="0"/>
+                <a:ea typeface="Calibri" pitchFamily="34" charset="-122"/>
+                <a:cs typeface="Calibri" pitchFamily="34" charset="-120"/>
+              </a:rPr>
+              <a:t>100%</a:t>
+            </a:r>
+            <a:endParaRPr lang="en-US" sz="5600" dirty="0"/>
+          </a:p>
+        </p:txBody>
+      </p:sp>
+      <p:sp>
+        <p:nvSpPr>
+          <p:cNvPr id="11" name="Text 9"/>
+          <p:cNvSpPr/>
+          <p:nvPr/>
+        </p:nvSpPr>
+        <p:spPr>
+          <a:xfrm>
+            <a:off x="822960" y="3611880"/>
+            <a:ext cx="9601200" cy="365760"/>
+          </a:xfrm>
+          <a:prstGeom prst="rect">
+            <a:avLst/>
+          </a:prstGeom>
+          <a:noFill/>
+          <a:ln/>
+        </p:spPr>
+        <p:txBody>
+          <a:bodyPr wrap="square" rtlCol="0" anchor="ctr"/>
+          <a:lstStyle/>
+          <a:p>
+            <a:pPr indent="0" marL="0">
+              <a:buNone/>
+            </a:pPr>
+            <a:r>
+              <a:rPr lang="en-US" sz="1300" i="1" dirty="0">
+                <a:solidFill>
+                  <a:srgbClr val="9E96C8"/>
+                </a:solidFill>
+                <a:latin typeface="Calibri" pitchFamily="34" charset="0"/>
+                <a:ea typeface="Calibri" pitchFamily="34" charset="-122"/>
+                <a:cs typeface="Calibri" pitchFamily="34" charset="-120"/>
+              </a:rPr>
+              <a:t>пример: пингвины (3 вида) · accuracy на test</a:t>
+            </a:r>
+            <a:endParaRPr lang="en-US" sz="1300" dirty="0"/>
+          </a:p>
+        </p:txBody>
+      </p:sp>
+      <p:sp>
+        <p:nvSpPr>
+          <p:cNvPr id="12" name="Shape 10"/>
+          <p:cNvSpPr/>
+          <p:nvPr/>
+        </p:nvSpPr>
+        <p:spPr>
+          <a:xfrm>
+            <a:off x="640080" y="4160520"/>
+            <a:ext cx="10881360" cy="777240"/>
+          </a:xfrm>
+          <a:prstGeom prst="roundRect">
+            <a:avLst>
+              <a:gd name="adj" fmla="val 11765"/>
             </a:avLst>
           </a:prstGeom>
           <a:solidFill>
@@ -2816,75 +3371,70 @@
           <a:ln/>
         </p:spPr>
       </p:sp>
-      <p:sp>
-        <p:nvSpPr>
-          <p:cNvPr id="5" name="Text 3"/>
-          <p:cNvSpPr/>
-          <p:nvPr/>
-        </p:nvSpPr>
-        <p:spPr>
-          <a:xfrm>
-            <a:off x="960120" y="2331720"/>
-            <a:ext cx="4572000" cy="457200"/>
-          </a:xfrm>
-          <a:prstGeom prst="rect">
-            <a:avLst/>
-          </a:prstGeom>
-          <a:noFill/>
-          <a:ln/>
-        </p:spPr>
-        <p:txBody>
-          <a:bodyPr wrap="square" rtlCol="0" anchor="t"/>
+      <p:pic>
+        <p:nvPicPr>
+          <p:cNvPr id="13" name="Image 0" descr="preencoded.png">    </p:cNvPr>
+          <p:cNvPicPr>
+            <a:picLocks noChangeAspect="1"/>
+          </p:cNvPicPr>
+          <p:nvPr/>
+        </p:nvPicPr>
+        <p:blipFill>
+          <a:blip r:embed="rId1"/>
+          <a:stretch>
+            <a:fillRect/>
+          </a:stretch>
+        </p:blipFill>
+        <p:spPr>
+          <a:xfrm>
+            <a:off x="914400" y="4315968"/>
+            <a:ext cx="457200" cy="457200"/>
+          </a:xfrm>
+          <a:prstGeom prst="rect">
+            <a:avLst/>
+          </a:prstGeom>
+        </p:spPr>
+      </p:pic>
+      <p:sp>
+        <p:nvSpPr>
+          <p:cNvPr id="14" name="Text 11"/>
+          <p:cNvSpPr/>
+          <p:nvPr/>
+        </p:nvSpPr>
+        <p:spPr>
+          <a:xfrm>
+            <a:off x="1554480" y="4160520"/>
+            <a:ext cx="9784080" cy="777240"/>
+          </a:xfrm>
+          <a:prstGeom prst="rect">
+            <a:avLst/>
+          </a:prstGeom>
+          <a:noFill/>
+          <a:ln/>
+        </p:spPr>
+        <p:txBody>
+          <a:bodyPr wrap="square" rtlCol="0" anchor="ctr"/>
           <a:lstStyle/>
           <a:p>
             <a:pPr indent="0" marL="0">
               <a:buNone/>
             </a:pPr>
             <a:r>
-              <a:rPr lang="en-US" sz="1900" b="1" dirty="0">
-                <a:solidFill>
-                  <a:srgbClr val="27D3EE"/>
-                </a:solidFill>
-                <a:latin typeface="Calibri" pitchFamily="34" charset="0"/>
-                <a:ea typeface="Calibri" pitchFamily="34" charset="-122"/>
-                <a:cs typeface="Calibri" pitchFamily="34" charset="-120"/>
-              </a:rPr>
-              <a:t>Слайды (3–5)</a:t>
-            </a:r>
-            <a:endParaRPr lang="en-US" sz="1900" dirty="0"/>
-          </a:p>
-        </p:txBody>
-      </p:sp>
-      <p:sp>
-        <p:nvSpPr>
-          <p:cNvPr id="6" name="Text 4"/>
-          <p:cNvSpPr/>
-          <p:nvPr/>
-        </p:nvSpPr>
-        <p:spPr>
-          <a:xfrm>
-            <a:off x="1005840" y="2880360"/>
-            <a:ext cx="4937760" cy="2743200"/>
-          </a:xfrm>
-          <a:prstGeom prst="rect">
-            <a:avLst/>
-          </a:prstGeom>
-          <a:noFill/>
-          <a:ln/>
-        </p:spPr>
-        <p:txBody>
-          <a:bodyPr wrap="square" rtlCol="0" anchor="t"/>
-          <a:lstStyle/>
-          <a:p>
-            <a:pPr marL="342900" indent="-342900">
-              <a:lnSpc>
-                <a:spcPct val="130000"/>
-              </a:lnSpc>
-              <a:buSzPct val="100000"/>
-              <a:buChar char="•"/>
-            </a:pPr>
-            <a:r>
-              <a:rPr lang="en-US" sz="1600" dirty="0">
+              <a:rPr lang="en-US" sz="1700" b="1" dirty="0">
+                <a:solidFill>
+                  <a:srgbClr val="2DD4BF"/>
+                </a:solidFill>
+                <a:latin typeface="Calibri" pitchFamily="34" charset="0"/>
+                <a:ea typeface="Calibri" pitchFamily="34" charset="-122"/>
+                <a:cs typeface="Calibri" pitchFamily="34" charset="-120"/>
+              </a:rPr>
+              <a:t>Как огранка алмаза: </a:t>
+            </a:r>
+            <a:pPr indent="0" marL="0">
+              <a:buNone/>
+            </a:pPr>
+            <a:r>
+              <a:rPr lang="en-US" sz="1700" dirty="0">
                 <a:solidFill>
                   <a:srgbClr val="D9D4F2"/>
                 </a:solidFill>
@@ -2892,188 +3442,100 @@
                 <a:ea typeface="Calibri" pitchFamily="34" charset="-122"/>
                 <a:cs typeface="Calibri" pitchFamily="34" charset="-120"/>
               </a:rPr>
-              <a:t>Задача — что и зачем
-</a:t>
-            </a:r>
-            <a:endParaRPr lang="en-US" sz="1600" dirty="0"/>
-          </a:p>
-          <a:p>
-            <a:pPr marL="342900" indent="-342900">
-              <a:lnSpc>
-                <a:spcPct val="130000"/>
-              </a:lnSpc>
-              <a:buSzPct val="100000"/>
-              <a:buChar char="•"/>
-            </a:pPr>
-            <a:r>
-              <a:rPr lang="en-US" sz="1600" dirty="0">
-                <a:solidFill>
-                  <a:srgbClr val="D9D4F2"/>
-                </a:solidFill>
-                <a:latin typeface="Calibri" pitchFamily="34" charset="0"/>
-                <a:ea typeface="Calibri" pitchFamily="34" charset="-122"/>
-                <a:cs typeface="Calibri" pitchFamily="34" charset="-120"/>
-              </a:rPr>
-              <a:t>Данные — откуда, сколько
-</a:t>
-            </a:r>
-            <a:endParaRPr lang="en-US" sz="1600" dirty="0"/>
-          </a:p>
-          <a:p>
-            <a:pPr marL="342900" indent="-342900">
-              <a:lnSpc>
-                <a:spcPct val="130000"/>
-              </a:lnSpc>
-              <a:buSzPct val="100000"/>
-              <a:buChar char="•"/>
-            </a:pPr>
-            <a:r>
-              <a:rPr lang="en-US" sz="1600" dirty="0">
-                <a:solidFill>
-                  <a:srgbClr val="D9D4F2"/>
-                </a:solidFill>
-                <a:latin typeface="Calibri" pitchFamily="34" charset="0"/>
-                <a:ea typeface="Calibri" pitchFamily="34" charset="-122"/>
-                <a:cs typeface="Calibri" pitchFamily="34" charset="-120"/>
-              </a:rPr>
-              <a:t>Модель — метрика vs baseline
-</a:t>
-            </a:r>
-            <a:endParaRPr lang="en-US" sz="1600" dirty="0"/>
-          </a:p>
-          <a:p>
-            <a:pPr marL="342900" indent="-342900">
-              <a:lnSpc>
-                <a:spcPct val="130000"/>
-              </a:lnSpc>
-              <a:buSzPct val="100000"/>
-              <a:buChar char="•"/>
-            </a:pPr>
-            <a:r>
-              <a:rPr lang="en-US" sz="1600" dirty="0">
-                <a:solidFill>
-                  <a:srgbClr val="D9D4F2"/>
-                </a:solidFill>
-                <a:latin typeface="Calibri" pitchFamily="34" charset="0"/>
-                <a:ea typeface="Calibri" pitchFamily="34" charset="-122"/>
-                <a:cs typeface="Calibri" pitchFamily="34" charset="-120"/>
-              </a:rPr>
-              <a:t>Демо — интерфейс
-</a:t>
-            </a:r>
-            <a:endParaRPr lang="en-US" sz="1600" dirty="0"/>
-          </a:p>
-          <a:p>
-            <a:pPr marL="342900" indent="-342900">
-              <a:lnSpc>
-                <a:spcPct val="130000"/>
-              </a:lnSpc>
-              <a:buSzPct val="100000"/>
-              <a:buChar char="•"/>
-            </a:pPr>
-            <a:r>
-              <a:rPr lang="en-US" sz="1600" dirty="0">
-                <a:solidFill>
-                  <a:srgbClr val="D9D4F2"/>
-                </a:solidFill>
-                <a:latin typeface="Calibri" pitchFamily="34" charset="0"/>
-                <a:ea typeface="Calibri" pitchFamily="34" charset="-122"/>
-                <a:cs typeface="Calibri" pitchFamily="34" charset="-120"/>
-              </a:rPr>
-              <a:t>Выводы — где ошибается, что дальше</a:t>
-            </a:r>
-            <a:endParaRPr lang="en-US" sz="1600" dirty="0"/>
-          </a:p>
-        </p:txBody>
-      </p:sp>
-      <p:sp>
-        <p:nvSpPr>
-          <p:cNvPr id="7" name="Shape 5"/>
-          <p:cNvSpPr/>
-          <p:nvPr/>
-        </p:nvSpPr>
-        <p:spPr>
-          <a:xfrm>
-            <a:off x="6446520" y="2103120"/>
-            <a:ext cx="5150815" cy="3657600"/>
+              <a:t>камень (модель) уже есть — параметрами и признаками придаём блеск.</a:t>
+            </a:r>
+            <a:endParaRPr lang="en-US" sz="1700" dirty="0"/>
+          </a:p>
+        </p:txBody>
+      </p:sp>
+      <p:sp>
+        <p:nvSpPr>
+          <p:cNvPr id="15" name="Shape 12"/>
+          <p:cNvSpPr/>
+          <p:nvPr/>
+        </p:nvSpPr>
+        <p:spPr>
+          <a:xfrm>
+            <a:off x="640080" y="5074920"/>
+            <a:ext cx="10881360" cy="868680"/>
           </a:xfrm>
           <a:prstGeom prst="roundRect">
             <a:avLst>
-              <a:gd name="adj" fmla="val 3000"/>
+              <a:gd name="adj" fmla="val 10526"/>
             </a:avLst>
           </a:prstGeom>
           <a:solidFill>
             <a:srgbClr val="241E42"/>
           </a:solidFill>
-          <a:ln/>
-        </p:spPr>
-      </p:sp>
-      <p:sp>
-        <p:nvSpPr>
-          <p:cNvPr id="8" name="Text 6"/>
-          <p:cNvSpPr/>
-          <p:nvPr/>
-        </p:nvSpPr>
-        <p:spPr>
-          <a:xfrm>
-            <a:off x="6812280" y="2331720"/>
-            <a:ext cx="4572000" cy="457200"/>
-          </a:xfrm>
-          <a:prstGeom prst="rect">
-            <a:avLst/>
-          </a:prstGeom>
-          <a:noFill/>
-          <a:ln/>
-        </p:spPr>
-        <p:txBody>
-          <a:bodyPr wrap="square" rtlCol="0" anchor="t"/>
+          <a:ln w="19050">
+            <a:solidFill>
+              <a:srgbClr val="27D3EE"/>
+            </a:solidFill>
+            <a:prstDash val="solid"/>
+          </a:ln>
+        </p:spPr>
+      </p:sp>
+      <p:pic>
+        <p:nvPicPr>
+          <p:cNvPr id="16" name="Image 1" descr="preencoded.png">    </p:cNvPr>
+          <p:cNvPicPr>
+            <a:picLocks noChangeAspect="1"/>
+          </p:cNvPicPr>
+          <p:nvPr/>
+        </p:nvPicPr>
+        <p:blipFill>
+          <a:blip r:embed="rId2"/>
+          <a:stretch>
+            <a:fillRect/>
+          </a:stretch>
+        </p:blipFill>
+        <p:spPr>
+          <a:xfrm>
+            <a:off x="914400" y="5257800"/>
+            <a:ext cx="457200" cy="457200"/>
+          </a:xfrm>
+          <a:prstGeom prst="rect">
+            <a:avLst/>
+          </a:prstGeom>
+        </p:spPr>
+      </p:pic>
+      <p:sp>
+        <p:nvSpPr>
+          <p:cNvPr id="17" name="Text 13"/>
+          <p:cNvSpPr/>
+          <p:nvPr/>
+        </p:nvSpPr>
+        <p:spPr>
+          <a:xfrm>
+            <a:off x="1554480" y="5074920"/>
+            <a:ext cx="9784080" cy="868680"/>
+          </a:xfrm>
+          <a:prstGeom prst="rect">
+            <a:avLst/>
+          </a:prstGeom>
+          <a:noFill/>
+          <a:ln/>
+        </p:spPr>
+        <p:txBody>
+          <a:bodyPr wrap="square" rtlCol="0" anchor="ctr"/>
           <a:lstStyle/>
           <a:p>
             <a:pPr indent="0" marL="0">
               <a:buNone/>
             </a:pPr>
             <a:r>
-              <a:rPr lang="en-US" sz="1900" b="1" dirty="0">
-                <a:solidFill>
-                  <a:srgbClr val="2DD4BF"/>
-                </a:solidFill>
-                <a:latin typeface="Calibri" pitchFamily="34" charset="0"/>
-                <a:ea typeface="Calibri" pitchFamily="34" charset="-122"/>
-                <a:cs typeface="Calibri" pitchFamily="34" charset="-120"/>
-              </a:rPr>
-              <a:t>README</a:t>
-            </a:r>
-            <a:endParaRPr lang="en-US" sz="1900" dirty="0"/>
-          </a:p>
-        </p:txBody>
-      </p:sp>
-      <p:sp>
-        <p:nvSpPr>
-          <p:cNvPr id="9" name="Text 7"/>
-          <p:cNvSpPr/>
-          <p:nvPr/>
-        </p:nvSpPr>
-        <p:spPr>
-          <a:xfrm>
-            <a:off x="6858000" y="2880360"/>
-            <a:ext cx="4510735" cy="2743200"/>
-          </a:xfrm>
-          <a:prstGeom prst="rect">
-            <a:avLst/>
-          </a:prstGeom>
-          <a:noFill/>
-          <a:ln/>
-        </p:spPr>
-        <p:txBody>
-          <a:bodyPr wrap="square" rtlCol="0" anchor="t"/>
-          <a:lstStyle/>
-          <a:p>
-            <a:pPr marL="342900" indent="-342900">
-              <a:lnSpc>
-                <a:spcPct val="130000"/>
-              </a:lnSpc>
-              <a:buSzPct val="100000"/>
-              <a:buChar char="•"/>
+              <a:rPr lang="en-US" sz="1600" b="1" dirty="0">
+                <a:solidFill>
+                  <a:srgbClr val="FFFFFF"/>
+                </a:solidFill>
+                <a:latin typeface="Calibri" pitchFamily="34" charset="0"/>
+                <a:ea typeface="Calibri" pitchFamily="34" charset="-122"/>
+                <a:cs typeface="Calibri" pitchFamily="34" charset="-120"/>
+              </a:rPr>
+              <a:t>Проверь свою модель · 2 минуты  </a:t>
+            </a:r>
+            <a:pPr indent="0" marL="0">
+              <a:buNone/>
             </a:pPr>
             <a:r>
               <a:rPr lang="en-US" sz="1600" dirty="0">
@@ -3084,97 +3546,31 @@
                 <a:ea typeface="Calibri" pitchFamily="34" charset="-122"/>
                 <a:cs typeface="Calibri" pitchFamily="34" charset="-120"/>
               </a:rPr>
-              <a:t>Что за проект и задача
-</a:t>
+              <a:t>— запусти GridSearchCV, запиши метрику до и после. Обыграла baseline?</a:t>
             </a:r>
             <a:endParaRPr lang="en-US" sz="1600" dirty="0"/>
           </a:p>
-          <a:p>
-            <a:pPr marL="342900" indent="-342900">
-              <a:lnSpc>
-                <a:spcPct val="130000"/>
-              </a:lnSpc>
-              <a:buSzPct val="100000"/>
-              <a:buChar char="•"/>
-            </a:pPr>
-            <a:r>
-              <a:rPr lang="en-US" sz="1600" dirty="0">
-                <a:solidFill>
-                  <a:srgbClr val="D9D4F2"/>
-                </a:solidFill>
-                <a:latin typeface="Calibri" pitchFamily="34" charset="0"/>
-                <a:ea typeface="Calibri" pitchFamily="34" charset="-122"/>
-                <a:cs typeface="Calibri" pitchFamily="34" charset="-120"/>
-              </a:rPr>
-              <a:t>Данные и модель (в Pipeline)
-</a:t>
-            </a:r>
-            <a:endParaRPr lang="en-US" sz="1600" dirty="0"/>
-          </a:p>
-          <a:p>
-            <a:pPr marL="342900" indent="-342900">
-              <a:lnSpc>
-                <a:spcPct val="130000"/>
-              </a:lnSpc>
-              <a:buSzPct val="100000"/>
-              <a:buChar char="•"/>
-            </a:pPr>
-            <a:r>
-              <a:rPr lang="en-US" sz="1600" dirty="0">
-                <a:solidFill>
-                  <a:srgbClr val="D9D4F2"/>
-                </a:solidFill>
-                <a:latin typeface="Calibri" pitchFamily="34" charset="0"/>
-                <a:ea typeface="Calibri" pitchFamily="34" charset="-122"/>
-                <a:cs typeface="Calibri" pitchFamily="34" charset="-120"/>
-              </a:rPr>
-              <a:t>Результаты (метрика)
-</a:t>
-            </a:r>
-            <a:endParaRPr lang="en-US" sz="1600" dirty="0"/>
-          </a:p>
-          <a:p>
-            <a:pPr marL="342900" indent="-342900">
-              <a:lnSpc>
-                <a:spcPct val="130000"/>
-              </a:lnSpc>
-              <a:buSzPct val="100000"/>
-              <a:buChar char="•"/>
-            </a:pPr>
-            <a:r>
-              <a:rPr lang="en-US" sz="1600" dirty="0">
-                <a:solidFill>
-                  <a:srgbClr val="D9D4F2"/>
-                </a:solidFill>
-                <a:latin typeface="Calibri" pitchFamily="34" charset="0"/>
-                <a:ea typeface="Calibri" pitchFamily="34" charset="-122"/>
-                <a:cs typeface="Calibri" pitchFamily="34" charset="-120"/>
-              </a:rPr>
-              <a:t>Как запустить / ссылка</a:t>
-            </a:r>
-            <a:endParaRPr lang="en-US" sz="1600" dirty="0"/>
-          </a:p>
-        </p:txBody>
-      </p:sp>
-      <p:sp>
-        <p:nvSpPr>
-          <p:cNvPr id="10" name="Text 8"/>
-          <p:cNvSpPr/>
-          <p:nvPr/>
-        </p:nvSpPr>
-        <p:spPr>
-          <a:xfrm>
-            <a:off x="10271455" y="6355080"/>
-            <a:ext cx="1371600" cy="274320"/>
-          </a:xfrm>
-          <a:prstGeom prst="rect">
-            <a:avLst/>
-          </a:prstGeom>
-          <a:noFill/>
-          <a:ln/>
-        </p:spPr>
-        <p:txBody>
-          <a:bodyPr wrap="square" rtlCol="0" anchor="t"/>
+        </p:txBody>
+      </p:sp>
+      <p:sp>
+        <p:nvSpPr>
+          <p:cNvPr id="18" name="Text 14"/>
+          <p:cNvSpPr/>
+          <p:nvPr/>
+        </p:nvSpPr>
+        <p:spPr>
+          <a:xfrm>
+            <a:off x="10698480" y="6309360"/>
+            <a:ext cx="1188720" cy="274320"/>
+          </a:xfrm>
+          <a:prstGeom prst="rect">
+            <a:avLst/>
+          </a:prstGeom>
+          <a:noFill/>
+          <a:ln/>
+        </p:spPr>
+        <p:txBody>
+          <a:bodyPr wrap="square" rtlCol="0" anchor="ctr"/>
           <a:lstStyle/>
           <a:p>
             <a:pPr algn="r" indent="0" marL="0">
@@ -3235,24 +3631,24 @@
         </p:nvSpPr>
         <p:spPr>
           <a:xfrm>
-            <a:off x="594360" y="457200"/>
-            <a:ext cx="11002975" cy="320040"/>
-          </a:xfrm>
-          <a:prstGeom prst="rect">
-            <a:avLst/>
-          </a:prstGeom>
-          <a:noFill/>
-          <a:ln/>
-        </p:spPr>
-        <p:txBody>
-          <a:bodyPr wrap="square" rtlCol="0" anchor="t"/>
+            <a:off x="640080" y="502920"/>
+            <a:ext cx="10058400" cy="365760"/>
+          </a:xfrm>
+          <a:prstGeom prst="rect">
+            <a:avLst/>
+          </a:prstGeom>
+          <a:noFill/>
+          <a:ln/>
+        </p:spPr>
+        <p:txBody>
+          <a:bodyPr wrap="square" rtlCol="0" anchor="ctr"/>
           <a:lstStyle/>
           <a:p>
             <a:pPr indent="0" marL="0">
               <a:buNone/>
             </a:pPr>
             <a:r>
-              <a:rPr lang="en-US" sz="1300" b="1" spc="200" kern="0" dirty="0">
+              <a:rPr lang="en-US" sz="1300" b="1" spc="300" kern="0" dirty="0">
                 <a:solidFill>
                   <a:srgbClr val="27D3EE"/>
                 </a:solidFill>
@@ -3260,7 +3656,7 @@
                 <a:ea typeface="Calibri" pitchFamily="34" charset="-122"/>
                 <a:cs typeface="Calibri" pitchFamily="34" charset="-120"/>
               </a:rPr>
-              <a:t>ИТОГ УРОКА</a:t>
+              <a:t>ПРОДУКТ</a:t>
             </a:r>
             <a:endParaRPr lang="en-US" sz="1300" dirty="0"/>
           </a:p>
@@ -3274,24 +3670,24 @@
         </p:nvSpPr>
         <p:spPr>
           <a:xfrm>
-            <a:off x="594360" y="749808"/>
-            <a:ext cx="11002975" cy="822960"/>
-          </a:xfrm>
-          <a:prstGeom prst="rect">
-            <a:avLst/>
-          </a:prstGeom>
-          <a:noFill/>
-          <a:ln/>
-        </p:spPr>
-        <p:txBody>
-          <a:bodyPr wrap="square" rtlCol="0" anchor="t"/>
+            <a:off x="640080" y="868680"/>
+            <a:ext cx="10058400" cy="640080"/>
+          </a:xfrm>
+          <a:prstGeom prst="rect">
+            <a:avLst/>
+          </a:prstGeom>
+          <a:noFill/>
+          <a:ln/>
+        </p:spPr>
+        <p:txBody>
+          <a:bodyPr wrap="square" rtlCol="0" anchor="ctr"/>
           <a:lstStyle/>
           <a:p>
             <a:pPr indent="0" marL="0">
               <a:buNone/>
             </a:pPr>
             <a:r>
-              <a:rPr lang="en-US" sz="3000" b="1" dirty="0">
+              <a:rPr lang="en-US" sz="3200" b="1" dirty="0">
                 <a:solidFill>
                   <a:srgbClr val="FFFFFF"/>
                 </a:solidFill>
@@ -3299,26 +3695,150 @@
                 <a:ea typeface="Calibri" pitchFamily="34" charset="-122"/>
                 <a:cs typeface="Calibri" pitchFamily="34" charset="-120"/>
               </a:rPr>
-              <a:t>Что должно быть к концу</a:t>
-            </a:r>
-            <a:endParaRPr lang="en-US" sz="3000" dirty="0"/>
-          </a:p>
-        </p:txBody>
-      </p:sp>
-      <p:sp>
-        <p:nvSpPr>
-          <p:cNvPr id="4" name="Shape 2"/>
-          <p:cNvSpPr/>
-          <p:nvPr/>
-        </p:nvSpPr>
-        <p:spPr>
-          <a:xfrm>
-            <a:off x="594360" y="1920240"/>
-            <a:ext cx="5577840" cy="4023360"/>
+              <a:t>Модель → веб-интерфейс</a:t>
+            </a:r>
+            <a:endParaRPr lang="en-US" sz="3200" dirty="0"/>
+          </a:p>
+        </p:txBody>
+      </p:sp>
+      <p:pic>
+        <p:nvPicPr>
+          <p:cNvPr id="4" name="Image 0" descr="preencoded.png">    </p:cNvPr>
+          <p:cNvPicPr>
+            <a:picLocks noChangeAspect="1"/>
+          </p:cNvPicPr>
+          <p:nvPr/>
+        </p:nvPicPr>
+        <p:blipFill>
+          <a:blip r:embed="rId1"/>
+          <a:stretch>
+            <a:fillRect/>
+          </a:stretch>
+        </p:blipFill>
+        <p:spPr>
+          <a:xfrm>
+            <a:off x="640080" y="1828800"/>
+            <a:ext cx="822960" cy="822960"/>
+          </a:xfrm>
+          <a:prstGeom prst="rect">
+            <a:avLst/>
+          </a:prstGeom>
+        </p:spPr>
+      </p:pic>
+      <p:sp>
+        <p:nvSpPr>
+          <p:cNvPr id="5" name="Text 2"/>
+          <p:cNvSpPr/>
+          <p:nvPr/>
+        </p:nvSpPr>
+        <p:spPr>
+          <a:xfrm>
+            <a:off x="1645920" y="1828800"/>
+            <a:ext cx="9875520" cy="822960"/>
+          </a:xfrm>
+          <a:prstGeom prst="rect">
+            <a:avLst/>
+          </a:prstGeom>
+          <a:noFill/>
+          <a:ln/>
+        </p:spPr>
+        <p:txBody>
+          <a:bodyPr wrap="square" rtlCol="0" anchor="ctr"/>
+          <a:lstStyle/>
+          <a:p>
+            <a:pPr indent="0" marL="0">
+              <a:buNone/>
+            </a:pPr>
+            <a:r>
+              <a:rPr lang="en-US" sz="1800" dirty="0">
+                <a:solidFill>
+                  <a:srgbClr val="D9D4F2"/>
+                </a:solidFill>
+                <a:latin typeface="Calibri" pitchFamily="34" charset="0"/>
+                <a:ea typeface="Calibri" pitchFamily="34" charset="-122"/>
+                <a:cs typeface="Calibri" pitchFamily="34" charset="-120"/>
+              </a:rPr>
+              <a:t>Оборачиваем модель в Gradio: пользователь вводит данные — получает предсказание.</a:t>
+            </a:r>
+            <a:endParaRPr lang="en-US" sz="1800" dirty="0"/>
+          </a:p>
+        </p:txBody>
+      </p:sp>
+      <p:sp>
+        <p:nvSpPr>
+          <p:cNvPr id="6" name="Shape 3"/>
+          <p:cNvSpPr/>
+          <p:nvPr/>
+        </p:nvSpPr>
+        <p:spPr>
+          <a:xfrm>
+            <a:off x="640080" y="2971800"/>
+            <a:ext cx="10881360" cy="1051560"/>
           </a:xfrm>
           <a:prstGeom prst="roundRect">
             <a:avLst>
-              <a:gd name="adj" fmla="val 2727"/>
+              <a:gd name="adj" fmla="val 8696"/>
+            </a:avLst>
+          </a:prstGeom>
+          <a:solidFill>
+            <a:srgbClr val="0E0B22"/>
+          </a:solidFill>
+          <a:ln/>
+        </p:spPr>
+      </p:sp>
+      <p:sp>
+        <p:nvSpPr>
+          <p:cNvPr id="7" name="Text 4"/>
+          <p:cNvSpPr/>
+          <p:nvPr/>
+        </p:nvSpPr>
+        <p:spPr>
+          <a:xfrm>
+            <a:off x="914400" y="2971800"/>
+            <a:ext cx="10332720" cy="1051560"/>
+          </a:xfrm>
+          <a:prstGeom prst="rect">
+            <a:avLst/>
+          </a:prstGeom>
+          <a:noFill/>
+          <a:ln/>
+        </p:spPr>
+        <p:txBody>
+          <a:bodyPr wrap="square" rtlCol="0" anchor="ctr"/>
+          <a:lstStyle/>
+          <a:p>
+            <a:pPr indent="0" marL="0">
+              <a:buNone/>
+            </a:pPr>
+            <a:r>
+              <a:rPr lang="en-US" sz="1600" dirty="0">
+                <a:solidFill>
+                  <a:srgbClr val="27D3EE"/>
+                </a:solidFill>
+                <a:latin typeface="Consolas" pitchFamily="34" charset="0"/>
+                <a:ea typeface="Consolas" pitchFamily="34" charset="-122"/>
+                <a:cs typeface="Consolas" pitchFamily="34" charset="-120"/>
+              </a:rPr>
+              <a:t>gr.Interface(fn=predict, inputs=[...], outputs=gr.Label()).launch(share=True)</a:t>
+            </a:r>
+            <a:endParaRPr lang="en-US" sz="1600" dirty="0"/>
+          </a:p>
+        </p:txBody>
+      </p:sp>
+      <p:sp>
+        <p:nvSpPr>
+          <p:cNvPr id="8" name="Shape 5"/>
+          <p:cNvSpPr/>
+          <p:nvPr/>
+        </p:nvSpPr>
+        <p:spPr>
+          <a:xfrm>
+            <a:off x="640080" y="4343400"/>
+            <a:ext cx="10881360" cy="1188720"/>
+          </a:xfrm>
+          <a:prstGeom prst="roundRect">
+            <a:avLst>
+              <a:gd name="adj" fmla="val 7692"/>
             </a:avLst>
           </a:prstGeom>
           <a:solidFill>
@@ -3329,38 +3849,325 @@
       </p:sp>
       <p:sp>
         <p:nvSpPr>
-          <p:cNvPr id="5" name="Text 3"/>
-          <p:cNvSpPr/>
-          <p:nvPr/>
-        </p:nvSpPr>
-        <p:spPr>
-          <a:xfrm>
-            <a:off x="960120" y="2148840"/>
-            <a:ext cx="4572000" cy="457200"/>
-          </a:xfrm>
-          <a:prstGeom prst="rect">
-            <a:avLst/>
-          </a:prstGeom>
-          <a:noFill/>
-          <a:ln/>
-        </p:spPr>
-        <p:txBody>
-          <a:bodyPr wrap="square" rtlCol="0" anchor="t"/>
+          <p:cNvPr id="9" name="Text 6"/>
+          <p:cNvSpPr/>
+          <p:nvPr/>
+        </p:nvSpPr>
+        <p:spPr>
+          <a:xfrm>
+            <a:off x="960120" y="4343400"/>
+            <a:ext cx="10241280" cy="1188720"/>
+          </a:xfrm>
+          <a:prstGeom prst="rect">
+            <a:avLst/>
+          </a:prstGeom>
+          <a:noFill/>
+          <a:ln/>
+        </p:spPr>
+        <p:txBody>
+          <a:bodyPr wrap="square" rtlCol="0" anchor="ctr"/>
           <a:lstStyle/>
           <a:p>
             <a:pPr indent="0" marL="0">
               <a:buNone/>
             </a:pPr>
             <a:r>
+              <a:rPr lang="en-US" sz="1700" b="1" dirty="0">
+                <a:solidFill>
+                  <a:srgbClr val="FF7A8A"/>
+                </a:solidFill>
+                <a:latin typeface="Calibri" pitchFamily="34" charset="0"/>
+                <a:ea typeface="Calibri" pitchFamily="34" charset="-122"/>
+                <a:cs typeface="Calibri" pitchFamily="34" charset="-120"/>
+              </a:rPr>
+              <a:t>Важно: </a:t>
+            </a:r>
+            <a:pPr indent="0" marL="0">
+              <a:buNone/>
+            </a:pPr>
+            <a:r>
+              <a:rPr lang="en-US" sz="1700" dirty="0">
+                <a:solidFill>
+                  <a:srgbClr val="D9D4F2"/>
+                </a:solidFill>
+                <a:latin typeface="Calibri" pitchFamily="34" charset="0"/>
+                <a:ea typeface="Calibri" pitchFamily="34" charset="-122"/>
+                <a:cs typeface="Calibri" pitchFamily="34" charset="-120"/>
+              </a:rPr>
+              <a:t>интерфейс принимает данные в том же формате, что ждёт модель (те же признаки). Проверь на новых примерах.</a:t>
+            </a:r>
+            <a:endParaRPr lang="en-US" sz="1700" dirty="0"/>
+          </a:p>
+        </p:txBody>
+      </p:sp>
+      <p:sp>
+        <p:nvSpPr>
+          <p:cNvPr id="10" name="Text 7"/>
+          <p:cNvSpPr/>
+          <p:nvPr/>
+        </p:nvSpPr>
+        <p:spPr>
+          <a:xfrm>
+            <a:off x="640080" y="6172200"/>
+            <a:ext cx="10881360" cy="457200"/>
+          </a:xfrm>
+          <a:prstGeom prst="rect">
+            <a:avLst/>
+          </a:prstGeom>
+          <a:noFill/>
+          <a:ln/>
+        </p:spPr>
+        <p:txBody>
+          <a:bodyPr wrap="square" rtlCol="0" anchor="ctr"/>
+          <a:lstStyle/>
+          <a:p>
+            <a:pPr indent="0" marL="0">
+              <a:buNone/>
+            </a:pPr>
+            <a:r>
+              <a:rPr lang="en-US" sz="1400" i="1" dirty="0">
+                <a:solidFill>
+                  <a:srgbClr val="9E96C8"/>
+                </a:solidFill>
+                <a:latin typeface="Calibri" pitchFamily="34" charset="0"/>
+                <a:ea typeface="Calibri" pitchFamily="34" charset="-122"/>
+                <a:cs typeface="Calibri" pitchFamily="34" charset="-120"/>
+              </a:rPr>
+              <a:t>Входы формы = признаки модели. Иначе интерфейс не заработает.</a:t>
+            </a:r>
+            <a:endParaRPr lang="en-US" sz="1400" dirty="0"/>
+          </a:p>
+        </p:txBody>
+      </p:sp>
+      <p:sp>
+        <p:nvSpPr>
+          <p:cNvPr id="11" name="Text 8"/>
+          <p:cNvSpPr/>
+          <p:nvPr/>
+        </p:nvSpPr>
+        <p:spPr>
+          <a:xfrm>
+            <a:off x="10698480" y="6309360"/>
+            <a:ext cx="1188720" cy="274320"/>
+          </a:xfrm>
+          <a:prstGeom prst="rect">
+            <a:avLst/>
+          </a:prstGeom>
+          <a:noFill/>
+          <a:ln/>
+        </p:spPr>
+        <p:txBody>
+          <a:bodyPr wrap="square" rtlCol="0" anchor="ctr"/>
+          <a:lstStyle/>
+          <a:p>
+            <a:pPr algn="r" indent="0" marL="0">
+              <a:buNone/>
+            </a:pPr>
+            <a:r>
+              <a:rPr lang="en-US" sz="1100" dirty="0">
+                <a:solidFill>
+                  <a:srgbClr val="9E96C8"/>
+                </a:solidFill>
+                <a:latin typeface="Calibri" pitchFamily="34" charset="0"/>
+                <a:ea typeface="Calibri" pitchFamily="34" charset="-122"/>
+                <a:cs typeface="Calibri" pitchFamily="34" charset="-120"/>
+              </a:rPr>
+              <a:t>Урок 22</a:t>
+            </a:r>
+            <a:endParaRPr lang="en-US" sz="1100" dirty="0"/>
+          </a:p>
+        </p:txBody>
+      </p:sp>
+    </p:spTree>
+  </p:cSld>
+  <p:clrMapOvr>
+    <a:masterClrMapping/>
+  </p:clrMapOvr>
+</p:sld>
+</file>
+
+<file path=ppt/slides/slide6.xml><?xml version="1.0" encoding="utf-8"?>
+<p:sld xmlns:a="http://schemas.openxmlformats.org/drawingml/2006/main" xmlns:r="http://schemas.openxmlformats.org/officeDocument/2006/relationships" xmlns:p="http://schemas.openxmlformats.org/presentationml/2006/main">
+  <p:cSld name="Slide 6">
+    <p:bg>
+      <p:bgPr>
+        <a:solidFill>
+          <a:srgbClr val="17132E"/>
+        </a:solidFill>
+      </p:bgPr>
+    </p:bg>
+    <p:spTree>
+      <p:nvGrpSpPr>
+        <p:cNvPr id="1" name=""/>
+        <p:cNvGrpSpPr/>
+        <p:nvPr/>
+      </p:nvGrpSpPr>
+      <p:grpSpPr>
+        <a:xfrm>
+          <a:off x="0" y="0"/>
+          <a:ext cx="0" cy="0"/>
+          <a:chOff x="0" y="0"/>
+          <a:chExt cx="0" cy="0"/>
+        </a:xfrm>
+      </p:grpSpPr>
+      <p:sp>
+        <p:nvSpPr>
+          <p:cNvPr id="2" name="Text 0"/>
+          <p:cNvSpPr/>
+          <p:nvPr/>
+        </p:nvSpPr>
+        <p:spPr>
+          <a:xfrm>
+            <a:off x="640080" y="502920"/>
+            <a:ext cx="10058400" cy="365760"/>
+          </a:xfrm>
+          <a:prstGeom prst="rect">
+            <a:avLst/>
+          </a:prstGeom>
+          <a:noFill/>
+          <a:ln/>
+        </p:spPr>
+        <p:txBody>
+          <a:bodyPr wrap="square" rtlCol="0" anchor="ctr"/>
+          <a:lstStyle/>
+          <a:p>
+            <a:pPr indent="0" marL="0">
+              <a:buNone/>
+            </a:pPr>
+            <a:r>
+              <a:rPr lang="en-US" sz="1300" b="1" spc="300" kern="0" dirty="0">
+                <a:solidFill>
+                  <a:srgbClr val="2DD4BF"/>
+                </a:solidFill>
+                <a:latin typeface="Calibri" pitchFamily="34" charset="0"/>
+                <a:ea typeface="Calibri" pitchFamily="34" charset="-122"/>
+                <a:cs typeface="Calibri" pitchFamily="34" charset="-120"/>
+              </a:rPr>
+              <a:t>РАССКАЗ</a:t>
+            </a:r>
+            <a:endParaRPr lang="en-US" sz="1300" dirty="0"/>
+          </a:p>
+        </p:txBody>
+      </p:sp>
+      <p:sp>
+        <p:nvSpPr>
+          <p:cNvPr id="3" name="Text 1"/>
+          <p:cNvSpPr/>
+          <p:nvPr/>
+        </p:nvSpPr>
+        <p:spPr>
+          <a:xfrm>
+            <a:off x="640080" y="868680"/>
+            <a:ext cx="10515600" cy="640080"/>
+          </a:xfrm>
+          <a:prstGeom prst="rect">
+            <a:avLst/>
+          </a:prstGeom>
+          <a:noFill/>
+          <a:ln/>
+        </p:spPr>
+        <p:txBody>
+          <a:bodyPr wrap="square" rtlCol="0" anchor="ctr"/>
+          <a:lstStyle/>
+          <a:p>
+            <a:pPr indent="0" marL="0">
+              <a:buNone/>
+            </a:pPr>
+            <a:r>
+              <a:rPr lang="en-US" sz="3200" b="1" dirty="0">
+                <a:solidFill>
+                  <a:srgbClr val="FFFFFF"/>
+                </a:solidFill>
+                <a:latin typeface="Calibri" pitchFamily="34" charset="0"/>
+                <a:ea typeface="Calibri" pitchFamily="34" charset="-122"/>
+                <a:cs typeface="Calibri" pitchFamily="34" charset="-120"/>
+              </a:rPr>
+              <a:t>Структура презентации и README</a:t>
+            </a:r>
+            <a:endParaRPr lang="en-US" sz="3200" dirty="0"/>
+          </a:p>
+        </p:txBody>
+      </p:sp>
+      <p:sp>
+        <p:nvSpPr>
+          <p:cNvPr id="4" name="Shape 2"/>
+          <p:cNvSpPr/>
+          <p:nvPr/>
+        </p:nvSpPr>
+        <p:spPr>
+          <a:xfrm>
+            <a:off x="640080" y="1783080"/>
+            <a:ext cx="5349240" cy="3840480"/>
+          </a:xfrm>
+          <a:prstGeom prst="roundRect">
+            <a:avLst>
+              <a:gd name="adj" fmla="val 2857"/>
+            </a:avLst>
+          </a:prstGeom>
+          <a:solidFill>
+            <a:srgbClr val="241E42"/>
+          </a:solidFill>
+          <a:ln/>
+        </p:spPr>
+      </p:sp>
+      <p:pic>
+        <p:nvPicPr>
+          <p:cNvPr id="5" name="Image 0" descr="preencoded.png">    </p:cNvPr>
+          <p:cNvPicPr>
+            <a:picLocks noChangeAspect="1"/>
+          </p:cNvPicPr>
+          <p:nvPr/>
+        </p:nvPicPr>
+        <p:blipFill>
+          <a:blip r:embed="rId1"/>
+          <a:stretch>
+            <a:fillRect/>
+          </a:stretch>
+        </p:blipFill>
+        <p:spPr>
+          <a:xfrm>
+            <a:off x="914400" y="2011680"/>
+            <a:ext cx="457200" cy="457200"/>
+          </a:xfrm>
+          <a:prstGeom prst="rect">
+            <a:avLst/>
+          </a:prstGeom>
+        </p:spPr>
+      </p:pic>
+      <p:sp>
+        <p:nvSpPr>
+          <p:cNvPr id="6" name="Text 3"/>
+          <p:cNvSpPr/>
+          <p:nvPr/>
+        </p:nvSpPr>
+        <p:spPr>
+          <a:xfrm>
+            <a:off x="1508760" y="2011680"/>
+            <a:ext cx="4206240" cy="457200"/>
+          </a:xfrm>
+          <a:prstGeom prst="rect">
+            <a:avLst/>
+          </a:prstGeom>
+          <a:noFill/>
+          <a:ln/>
+        </p:spPr>
+        <p:txBody>
+          <a:bodyPr wrap="square" rtlCol="0" anchor="ctr"/>
+          <a:lstStyle/>
+          <a:p>
+            <a:pPr indent="0" marL="0">
+              <a:buNone/>
+            </a:pPr>
+            <a:r>
               <a:rPr lang="en-US" sz="2000" b="1" dirty="0">
                 <a:solidFill>
-                  <a:srgbClr val="27D3EE"/>
-                </a:solidFill>
-                <a:latin typeface="Calibri" pitchFamily="34" charset="0"/>
-                <a:ea typeface="Calibri" pitchFamily="34" charset="-122"/>
-                <a:cs typeface="Calibri" pitchFamily="34" charset="-120"/>
-              </a:rPr>
-              <a:t>Готово к репетиции</a:t>
+                  <a:srgbClr val="FFFFFF"/>
+                </a:solidFill>
+                <a:latin typeface="Calibri" pitchFamily="34" charset="0"/>
+                <a:ea typeface="Calibri" pitchFamily="34" charset="-122"/>
+                <a:cs typeface="Calibri" pitchFamily="34" charset="-120"/>
+              </a:rPr>
+              <a:t>Слайды (3–5)</a:t>
             </a:r>
             <a:endParaRPr lang="en-US" sz="2000" dirty="0"/>
           </a:p>
@@ -3368,34 +4175,34 @@
       </p:sp>
       <p:sp>
         <p:nvSpPr>
-          <p:cNvPr id="6" name="Text 4"/>
-          <p:cNvSpPr/>
-          <p:nvPr/>
-        </p:nvSpPr>
-        <p:spPr>
-          <a:xfrm>
-            <a:off x="1005840" y="2743200"/>
-            <a:ext cx="4937760" cy="2926080"/>
-          </a:xfrm>
-          <a:prstGeom prst="rect">
-            <a:avLst/>
-          </a:prstGeom>
-          <a:noFill/>
-          <a:ln/>
-        </p:spPr>
-        <p:txBody>
-          <a:bodyPr wrap="square" rtlCol="0" anchor="t"/>
+          <p:cNvPr id="7" name="Text 4"/>
+          <p:cNvSpPr/>
+          <p:nvPr/>
+        </p:nvSpPr>
+        <p:spPr>
+          <a:xfrm>
+            <a:off x="960120" y="2743200"/>
+            <a:ext cx="4754880" cy="2743200"/>
+          </a:xfrm>
+          <a:prstGeom prst="rect">
+            <a:avLst/>
+          </a:prstGeom>
+          <a:noFill/>
+          <a:ln/>
+        </p:spPr>
+        <p:txBody>
+          <a:bodyPr wrap="square" rtlCol="0" anchor="ctr"/>
           <a:lstStyle/>
           <a:p>
             <a:pPr marL="342900" indent="-342900">
-              <a:lnSpc>
-                <a:spcPct val="135000"/>
-              </a:lnSpc>
+              <a:spcAft>
+                <a:spcPts val="900"/>
+              </a:spcAft>
               <a:buSzPct val="100000"/>
               <a:buChar char="•"/>
             </a:pPr>
             <a:r>
-              <a:rPr lang="en-US" sz="1700" dirty="0">
+              <a:rPr lang="en-US" sz="1600" dirty="0">
                 <a:solidFill>
                   <a:srgbClr val="D9D4F2"/>
                 </a:solidFill>
@@ -3403,21 +4210,20 @@
                 <a:ea typeface="Calibri" pitchFamily="34" charset="-122"/>
                 <a:cs typeface="Calibri" pitchFamily="34" charset="-120"/>
               </a:rPr>
-              <a:t>Модель улучшена и честно оценена
-</a:t>
-            </a:r>
-            <a:endParaRPr lang="en-US" sz="1700" dirty="0"/>
+              <a:t>Задача — что и зачем</a:t>
+            </a:r>
+            <a:endParaRPr lang="en-US" sz="1600" dirty="0"/>
           </a:p>
           <a:p>
             <a:pPr marL="342900" indent="-342900">
-              <a:lnSpc>
-                <a:spcPct val="135000"/>
-              </a:lnSpc>
+              <a:spcAft>
+                <a:spcPts val="900"/>
+              </a:spcAft>
               <a:buSzPct val="100000"/>
               <a:buChar char="•"/>
             </a:pPr>
             <a:r>
-              <a:rPr lang="en-US" sz="1700" dirty="0">
+              <a:rPr lang="en-US" sz="1600" dirty="0">
                 <a:solidFill>
                   <a:srgbClr val="D9D4F2"/>
                 </a:solidFill>
@@ -3425,21 +4231,20 @@
                 <a:ea typeface="Calibri" pitchFamily="34" charset="-122"/>
                 <a:cs typeface="Calibri" pitchFamily="34" charset="-120"/>
               </a:rPr>
-              <a:t>Работает веб-интерфейс
-</a:t>
-            </a:r>
-            <a:endParaRPr lang="en-US" sz="1700" dirty="0"/>
+              <a:t>Данные — откуда, сколько</a:t>
+            </a:r>
+            <a:endParaRPr lang="en-US" sz="1600" dirty="0"/>
           </a:p>
           <a:p>
             <a:pPr marL="342900" indent="-342900">
-              <a:lnSpc>
-                <a:spcPct val="135000"/>
-              </a:lnSpc>
+              <a:spcAft>
+                <a:spcPts val="900"/>
+              </a:spcAft>
               <a:buSzPct val="100000"/>
               <a:buChar char="•"/>
             </a:pPr>
             <a:r>
-              <a:rPr lang="en-US" sz="1700" dirty="0">
+              <a:rPr lang="en-US" sz="1600" dirty="0">
                 <a:solidFill>
                   <a:srgbClr val="D9D4F2"/>
                 </a:solidFill>
@@ -3447,75 +4252,119 @@
                 <a:ea typeface="Calibri" pitchFamily="34" charset="-122"/>
                 <a:cs typeface="Calibri" pitchFamily="34" charset="-120"/>
               </a:rPr>
-              <a:t>Есть структура презентации
-</a:t>
-            </a:r>
-            <a:endParaRPr lang="en-US" sz="1700" dirty="0"/>
+              <a:t>Модель — метрика vs baseline</a:t>
+            </a:r>
+            <a:endParaRPr lang="en-US" sz="1600" dirty="0"/>
           </a:p>
           <a:p>
             <a:pPr marL="342900" indent="-342900">
-              <a:lnSpc>
-                <a:spcPct val="135000"/>
-              </a:lnSpc>
+              <a:spcAft>
+                <a:spcPts val="900"/>
+              </a:spcAft>
               <a:buSzPct val="100000"/>
               <a:buChar char="•"/>
             </a:pPr>
             <a:r>
-              <a:rPr lang="en-US" sz="1700" b="1" dirty="0">
-                <a:solidFill>
-                  <a:srgbClr val="2DD4BF"/>
-                </a:solidFill>
-                <a:latin typeface="Calibri" pitchFamily="34" charset="0"/>
-                <a:ea typeface="Calibri" pitchFamily="34" charset="-122"/>
-                <a:cs typeface="Calibri" pitchFamily="34" charset="-120"/>
-              </a:rPr>
-              <a:t>Черновик README</a:t>
-            </a:r>
-            <a:endParaRPr lang="en-US" sz="1700" dirty="0"/>
-          </a:p>
-        </p:txBody>
-      </p:sp>
-      <p:sp>
-        <p:nvSpPr>
-          <p:cNvPr id="7" name="Shape 5"/>
-          <p:cNvSpPr/>
-          <p:nvPr/>
-        </p:nvSpPr>
-        <p:spPr>
-          <a:xfrm>
-            <a:off x="6446520" y="1920240"/>
-            <a:ext cx="5150815" cy="4023360"/>
+              <a:rPr lang="en-US" sz="1600" dirty="0">
+                <a:solidFill>
+                  <a:srgbClr val="D9D4F2"/>
+                </a:solidFill>
+                <a:latin typeface="Calibri" pitchFamily="34" charset="0"/>
+                <a:ea typeface="Calibri" pitchFamily="34" charset="-122"/>
+                <a:cs typeface="Calibri" pitchFamily="34" charset="-120"/>
+              </a:rPr>
+              <a:t>Демо — интерфейс</a:t>
+            </a:r>
+            <a:endParaRPr lang="en-US" sz="1600" dirty="0"/>
+          </a:p>
+          <a:p>
+            <a:pPr marL="342900" indent="-342900">
+              <a:spcAft>
+                <a:spcPts val="900"/>
+              </a:spcAft>
+              <a:buSzPct val="100000"/>
+              <a:buChar char="•"/>
+            </a:pPr>
+            <a:r>
+              <a:rPr lang="en-US" sz="1600" dirty="0">
+                <a:solidFill>
+                  <a:srgbClr val="D9D4F2"/>
+                </a:solidFill>
+                <a:latin typeface="Calibri" pitchFamily="34" charset="0"/>
+                <a:ea typeface="Calibri" pitchFamily="34" charset="-122"/>
+                <a:cs typeface="Calibri" pitchFamily="34" charset="-120"/>
+              </a:rPr>
+              <a:t>Выводы — где ошибается, что дальше</a:t>
+            </a:r>
+            <a:endParaRPr lang="en-US" sz="1600" dirty="0"/>
+          </a:p>
+        </p:txBody>
+      </p:sp>
+      <p:sp>
+        <p:nvSpPr>
+          <p:cNvPr id="8" name="Shape 5"/>
+          <p:cNvSpPr/>
+          <p:nvPr/>
+        </p:nvSpPr>
+        <p:spPr>
+          <a:xfrm>
+            <a:off x="6172200" y="1783080"/>
+            <a:ext cx="5349240" cy="3840480"/>
           </a:xfrm>
           <a:prstGeom prst="roundRect">
             <a:avLst>
-              <a:gd name="adj" fmla="val 2727"/>
+              <a:gd name="adj" fmla="val 2857"/>
             </a:avLst>
           </a:prstGeom>
           <a:solidFill>
-            <a:srgbClr val="2C2552"/>
+            <a:srgbClr val="241E42"/>
           </a:solidFill>
           <a:ln/>
         </p:spPr>
       </p:sp>
-      <p:sp>
-        <p:nvSpPr>
-          <p:cNvPr id="8" name="Text 6"/>
-          <p:cNvSpPr/>
-          <p:nvPr/>
-        </p:nvSpPr>
-        <p:spPr>
-          <a:xfrm>
-            <a:off x="6812280" y="2148840"/>
-            <a:ext cx="4572000" cy="457200"/>
-          </a:xfrm>
-          <a:prstGeom prst="rect">
-            <a:avLst/>
-          </a:prstGeom>
-          <a:noFill/>
-          <a:ln/>
-        </p:spPr>
-        <p:txBody>
-          <a:bodyPr wrap="square" rtlCol="0" anchor="t"/>
+      <p:pic>
+        <p:nvPicPr>
+          <p:cNvPr id="9" name="Image 1" descr="preencoded.png">    </p:cNvPr>
+          <p:cNvPicPr>
+            <a:picLocks noChangeAspect="1"/>
+          </p:cNvPicPr>
+          <p:nvPr/>
+        </p:nvPicPr>
+        <p:blipFill>
+          <a:blip r:embed="rId2"/>
+          <a:stretch>
+            <a:fillRect/>
+          </a:stretch>
+        </p:blipFill>
+        <p:spPr>
+          <a:xfrm>
+            <a:off x="6446520" y="2011680"/>
+            <a:ext cx="457200" cy="457200"/>
+          </a:xfrm>
+          <a:prstGeom prst="rect">
+            <a:avLst/>
+          </a:prstGeom>
+        </p:spPr>
+      </p:pic>
+      <p:sp>
+        <p:nvSpPr>
+          <p:cNvPr id="10" name="Text 6"/>
+          <p:cNvSpPr/>
+          <p:nvPr/>
+        </p:nvSpPr>
+        <p:spPr>
+          <a:xfrm>
+            <a:off x="7040880" y="2011680"/>
+            <a:ext cx="4206240" cy="457200"/>
+          </a:xfrm>
+          <a:prstGeom prst="rect">
+            <a:avLst/>
+          </a:prstGeom>
+          <a:noFill/>
+          <a:ln/>
+        </p:spPr>
+        <p:txBody>
+          <a:bodyPr wrap="square" rtlCol="0" anchor="ctr"/>
           <a:lstStyle/>
           <a:p>
             <a:pPr indent="0" marL="0">
@@ -3524,13 +4373,13 @@
             <a:r>
               <a:rPr lang="en-US" sz="2000" b="1" dirty="0">
                 <a:solidFill>
-                  <a:srgbClr val="2DD4BF"/>
-                </a:solidFill>
-                <a:latin typeface="Calibri" pitchFamily="34" charset="0"/>
-                <a:ea typeface="Calibri" pitchFamily="34" charset="-122"/>
-                <a:cs typeface="Calibri" pitchFamily="34" charset="-120"/>
-              </a:rPr>
-              <a:t>Дальше</a:t>
+                  <a:srgbClr val="FFFFFF"/>
+                </a:solidFill>
+                <a:latin typeface="Calibri" pitchFamily="34" charset="0"/>
+                <a:ea typeface="Calibri" pitchFamily="34" charset="-122"/>
+                <a:cs typeface="Calibri" pitchFamily="34" charset="-120"/>
+              </a:rPr>
+              <a:t>README</a:t>
             </a:r>
             <a:endParaRPr lang="en-US" sz="2000" dirty="0"/>
           </a:p>
@@ -3538,34 +4387,34 @@
       </p:sp>
       <p:sp>
         <p:nvSpPr>
-          <p:cNvPr id="9" name="Text 7"/>
-          <p:cNvSpPr/>
-          <p:nvPr/>
-        </p:nvSpPr>
-        <p:spPr>
-          <a:xfrm>
-            <a:off x="6858000" y="2743200"/>
-            <a:ext cx="4510735" cy="2926080"/>
-          </a:xfrm>
-          <a:prstGeom prst="rect">
-            <a:avLst/>
-          </a:prstGeom>
-          <a:noFill/>
-          <a:ln/>
-        </p:spPr>
-        <p:txBody>
-          <a:bodyPr wrap="square" rtlCol="0" anchor="t"/>
+          <p:cNvPr id="11" name="Text 7"/>
+          <p:cNvSpPr/>
+          <p:nvPr/>
+        </p:nvSpPr>
+        <p:spPr>
+          <a:xfrm>
+            <a:off x="6492240" y="2743200"/>
+            <a:ext cx="4754880" cy="2743200"/>
+          </a:xfrm>
+          <a:prstGeom prst="rect">
+            <a:avLst/>
+          </a:prstGeom>
+          <a:noFill/>
+          <a:ln/>
+        </p:spPr>
+        <p:txBody>
+          <a:bodyPr wrap="square" rtlCol="0" anchor="ctr"/>
           <a:lstStyle/>
           <a:p>
             <a:pPr marL="342900" indent="-342900">
-              <a:lnSpc>
-                <a:spcPct val="140000"/>
-              </a:lnSpc>
+              <a:spcAft>
+                <a:spcPts val="900"/>
+              </a:spcAft>
               <a:buSzPct val="100000"/>
               <a:buChar char="•"/>
             </a:pPr>
             <a:r>
-              <a:rPr lang="en-US" sz="1700" dirty="0">
+              <a:rPr lang="en-US" sz="1600" dirty="0">
                 <a:solidFill>
                   <a:srgbClr val="D9D4F2"/>
                 </a:solidFill>
@@ -3573,20 +4422,376 @@
                 <a:ea typeface="Calibri" pitchFamily="34" charset="-122"/>
                 <a:cs typeface="Calibri" pitchFamily="34" charset="-120"/>
               </a:rPr>
-              <a:t>Урок 23 — репетиция презентации и финальный деплой
-</a:t>
-            </a:r>
-            <a:endParaRPr lang="en-US" sz="1700" dirty="0"/>
+              <a:t>Что за проект и задача</a:t>
+            </a:r>
+            <a:endParaRPr lang="en-US" sz="1600" dirty="0"/>
           </a:p>
           <a:p>
             <a:pPr marL="342900" indent="-342900">
-              <a:lnSpc>
-                <a:spcPct val="140000"/>
-              </a:lnSpc>
+              <a:spcAft>
+                <a:spcPts val="900"/>
+              </a:spcAft>
               <a:buSzPct val="100000"/>
               <a:buChar char="•"/>
             </a:pPr>
             <a:r>
+              <a:rPr lang="en-US" sz="1600" dirty="0">
+                <a:solidFill>
+                  <a:srgbClr val="D9D4F2"/>
+                </a:solidFill>
+                <a:latin typeface="Calibri" pitchFamily="34" charset="0"/>
+                <a:ea typeface="Calibri" pitchFamily="34" charset="-122"/>
+                <a:cs typeface="Calibri" pitchFamily="34" charset="-120"/>
+              </a:rPr>
+              <a:t>Данные и модель (в Pipeline)</a:t>
+            </a:r>
+            <a:endParaRPr lang="en-US" sz="1600" dirty="0"/>
+          </a:p>
+          <a:p>
+            <a:pPr marL="342900" indent="-342900">
+              <a:spcAft>
+                <a:spcPts val="900"/>
+              </a:spcAft>
+              <a:buSzPct val="100000"/>
+              <a:buChar char="•"/>
+            </a:pPr>
+            <a:r>
+              <a:rPr lang="en-US" sz="1600" dirty="0">
+                <a:solidFill>
+                  <a:srgbClr val="D9D4F2"/>
+                </a:solidFill>
+                <a:latin typeface="Calibri" pitchFamily="34" charset="0"/>
+                <a:ea typeface="Calibri" pitchFamily="34" charset="-122"/>
+                <a:cs typeface="Calibri" pitchFamily="34" charset="-120"/>
+              </a:rPr>
+              <a:t>Результаты (метрика)</a:t>
+            </a:r>
+            <a:endParaRPr lang="en-US" sz="1600" dirty="0"/>
+          </a:p>
+          <a:p>
+            <a:pPr marL="342900" indent="-342900">
+              <a:spcAft>
+                <a:spcPts val="900"/>
+              </a:spcAft>
+              <a:buSzPct val="100000"/>
+              <a:buChar char="•"/>
+            </a:pPr>
+            <a:r>
+              <a:rPr lang="en-US" sz="1600" dirty="0">
+                <a:solidFill>
+                  <a:srgbClr val="D9D4F2"/>
+                </a:solidFill>
+                <a:latin typeface="Calibri" pitchFamily="34" charset="0"/>
+                <a:ea typeface="Calibri" pitchFamily="34" charset="-122"/>
+                <a:cs typeface="Calibri" pitchFamily="34" charset="-120"/>
+              </a:rPr>
+              <a:t>Как запустить / ссылка</a:t>
+            </a:r>
+            <a:endParaRPr lang="en-US" sz="1600" dirty="0"/>
+          </a:p>
+        </p:txBody>
+      </p:sp>
+      <p:sp>
+        <p:nvSpPr>
+          <p:cNvPr id="12" name="Text 8"/>
+          <p:cNvSpPr/>
+          <p:nvPr/>
+        </p:nvSpPr>
+        <p:spPr>
+          <a:xfrm>
+            <a:off x="640080" y="6172200"/>
+            <a:ext cx="10881360" cy="457200"/>
+          </a:xfrm>
+          <a:prstGeom prst="rect">
+            <a:avLst/>
+          </a:prstGeom>
+          <a:noFill/>
+          <a:ln/>
+        </p:spPr>
+        <p:txBody>
+          <a:bodyPr wrap="square" rtlCol="0" anchor="ctr"/>
+          <a:lstStyle/>
+          <a:p>
+            <a:pPr indent="0" marL="0">
+              <a:buNone/>
+            </a:pPr>
+            <a:r>
+              <a:rPr lang="en-US" sz="1400" i="1" dirty="0">
+                <a:solidFill>
+                  <a:srgbClr val="9E96C8"/>
+                </a:solidFill>
+                <a:latin typeface="Calibri" pitchFamily="34" charset="0"/>
+                <a:ea typeface="Calibri" pitchFamily="34" charset="-122"/>
+                <a:cs typeface="Calibri" pitchFamily="34" charset="-120"/>
+              </a:rPr>
+              <a:t>Рассказывай историю «задача → результат», а не показывай код.</a:t>
+            </a:r>
+            <a:endParaRPr lang="en-US" sz="1400" dirty="0"/>
+          </a:p>
+        </p:txBody>
+      </p:sp>
+      <p:sp>
+        <p:nvSpPr>
+          <p:cNvPr id="13" name="Text 9"/>
+          <p:cNvSpPr/>
+          <p:nvPr/>
+        </p:nvSpPr>
+        <p:spPr>
+          <a:xfrm>
+            <a:off x="10698480" y="6309360"/>
+            <a:ext cx="1188720" cy="274320"/>
+          </a:xfrm>
+          <a:prstGeom prst="rect">
+            <a:avLst/>
+          </a:prstGeom>
+          <a:noFill/>
+          <a:ln/>
+        </p:spPr>
+        <p:txBody>
+          <a:bodyPr wrap="square" rtlCol="0" anchor="ctr"/>
+          <a:lstStyle/>
+          <a:p>
+            <a:pPr algn="r" indent="0" marL="0">
+              <a:buNone/>
+            </a:pPr>
+            <a:r>
+              <a:rPr lang="en-US" sz="1100" dirty="0">
+                <a:solidFill>
+                  <a:srgbClr val="9E96C8"/>
+                </a:solidFill>
+                <a:latin typeface="Calibri" pitchFamily="34" charset="0"/>
+                <a:ea typeface="Calibri" pitchFamily="34" charset="-122"/>
+                <a:cs typeface="Calibri" pitchFamily="34" charset="-120"/>
+              </a:rPr>
+              <a:t>Урок 22</a:t>
+            </a:r>
+            <a:endParaRPr lang="en-US" sz="1100" dirty="0"/>
+          </a:p>
+        </p:txBody>
+      </p:sp>
+    </p:spTree>
+  </p:cSld>
+  <p:clrMapOvr>
+    <a:masterClrMapping/>
+  </p:clrMapOvr>
+</p:sld>
+</file>
+
+<file path=ppt/slides/slide7.xml><?xml version="1.0" encoding="utf-8"?>
+<p:sld xmlns:a="http://schemas.openxmlformats.org/drawingml/2006/main" xmlns:r="http://schemas.openxmlformats.org/officeDocument/2006/relationships" xmlns:p="http://schemas.openxmlformats.org/presentationml/2006/main">
+  <p:cSld name="Slide 7">
+    <p:bg>
+      <p:bgPr>
+        <a:solidFill>
+          <a:srgbClr val="17132E"/>
+        </a:solidFill>
+      </p:bgPr>
+    </p:bg>
+    <p:spTree>
+      <p:nvGrpSpPr>
+        <p:cNvPr id="1" name=""/>
+        <p:cNvGrpSpPr/>
+        <p:nvPr/>
+      </p:nvGrpSpPr>
+      <p:grpSpPr>
+        <a:xfrm>
+          <a:off x="0" y="0"/>
+          <a:ext cx="0" cy="0"/>
+          <a:chOff x="0" y="0"/>
+          <a:chExt cx="0" cy="0"/>
+        </a:xfrm>
+      </p:grpSpPr>
+      <p:sp>
+        <p:nvSpPr>
+          <p:cNvPr id="2" name="Text 0"/>
+          <p:cNvSpPr/>
+          <p:nvPr/>
+        </p:nvSpPr>
+        <p:spPr>
+          <a:xfrm>
+            <a:off x="640080" y="502920"/>
+            <a:ext cx="10058400" cy="365760"/>
+          </a:xfrm>
+          <a:prstGeom prst="rect">
+            <a:avLst/>
+          </a:prstGeom>
+          <a:noFill/>
+          <a:ln/>
+        </p:spPr>
+        <p:txBody>
+          <a:bodyPr wrap="square" rtlCol="0" anchor="ctr"/>
+          <a:lstStyle/>
+          <a:p>
+            <a:pPr indent="0" marL="0">
+              <a:buNone/>
+            </a:pPr>
+            <a:r>
+              <a:rPr lang="en-US" sz="1300" b="1" spc="300" kern="0" dirty="0">
+                <a:solidFill>
+                  <a:srgbClr val="6EE7B7"/>
+                </a:solidFill>
+                <a:latin typeface="Calibri" pitchFamily="34" charset="0"/>
+                <a:ea typeface="Calibri" pitchFamily="34" charset="-122"/>
+                <a:cs typeface="Calibri" pitchFamily="34" charset="-120"/>
+              </a:rPr>
+              <a:t>ИТОГ УРОКА</a:t>
+            </a:r>
+            <a:endParaRPr lang="en-US" sz="1300" dirty="0"/>
+          </a:p>
+        </p:txBody>
+      </p:sp>
+      <p:sp>
+        <p:nvSpPr>
+          <p:cNvPr id="3" name="Text 1"/>
+          <p:cNvSpPr/>
+          <p:nvPr/>
+        </p:nvSpPr>
+        <p:spPr>
+          <a:xfrm>
+            <a:off x="640080" y="868680"/>
+            <a:ext cx="10058400" cy="640080"/>
+          </a:xfrm>
+          <a:prstGeom prst="rect">
+            <a:avLst/>
+          </a:prstGeom>
+          <a:noFill/>
+          <a:ln/>
+        </p:spPr>
+        <p:txBody>
+          <a:bodyPr wrap="square" rtlCol="0" anchor="ctr"/>
+          <a:lstStyle/>
+          <a:p>
+            <a:pPr indent="0" marL="0">
+              <a:buNone/>
+            </a:pPr>
+            <a:r>
+              <a:rPr lang="en-US" sz="3200" b="1" dirty="0">
+                <a:solidFill>
+                  <a:srgbClr val="FFFFFF"/>
+                </a:solidFill>
+                <a:latin typeface="Calibri" pitchFamily="34" charset="0"/>
+                <a:ea typeface="Calibri" pitchFamily="34" charset="-122"/>
+                <a:cs typeface="Calibri" pitchFamily="34" charset="-120"/>
+              </a:rPr>
+              <a:t>Что должно быть к концу</a:t>
+            </a:r>
+            <a:endParaRPr lang="en-US" sz="3200" dirty="0"/>
+          </a:p>
+        </p:txBody>
+      </p:sp>
+      <p:sp>
+        <p:nvSpPr>
+          <p:cNvPr id="4" name="Shape 2"/>
+          <p:cNvSpPr/>
+          <p:nvPr/>
+        </p:nvSpPr>
+        <p:spPr>
+          <a:xfrm>
+            <a:off x="640080" y="1783080"/>
+            <a:ext cx="10881360" cy="3108960"/>
+          </a:xfrm>
+          <a:prstGeom prst="roundRect">
+            <a:avLst>
+              <a:gd name="adj" fmla="val 3529"/>
+            </a:avLst>
+          </a:prstGeom>
+          <a:solidFill>
+            <a:srgbClr val="241E42"/>
+          </a:solidFill>
+          <a:ln/>
+        </p:spPr>
+      </p:sp>
+      <p:pic>
+        <p:nvPicPr>
+          <p:cNvPr id="5" name="Image 0" descr="preencoded.png">    </p:cNvPr>
+          <p:cNvPicPr>
+            <a:picLocks noChangeAspect="1"/>
+          </p:cNvPicPr>
+          <p:nvPr/>
+        </p:nvPicPr>
+        <p:blipFill>
+          <a:blip r:embed="rId1"/>
+          <a:stretch>
+            <a:fillRect/>
+          </a:stretch>
+        </p:blipFill>
+        <p:spPr>
+          <a:xfrm>
+            <a:off x="914400" y="2011680"/>
+            <a:ext cx="457200" cy="457200"/>
+          </a:xfrm>
+          <a:prstGeom prst="rect">
+            <a:avLst/>
+          </a:prstGeom>
+        </p:spPr>
+      </p:pic>
+      <p:sp>
+        <p:nvSpPr>
+          <p:cNvPr id="6" name="Text 3"/>
+          <p:cNvSpPr/>
+          <p:nvPr/>
+        </p:nvSpPr>
+        <p:spPr>
+          <a:xfrm>
+            <a:off x="1508760" y="2011680"/>
+            <a:ext cx="8229600" cy="457200"/>
+          </a:xfrm>
+          <a:prstGeom prst="rect">
+            <a:avLst/>
+          </a:prstGeom>
+          <a:noFill/>
+          <a:ln/>
+        </p:spPr>
+        <p:txBody>
+          <a:bodyPr wrap="square" rtlCol="0" anchor="ctr"/>
+          <a:lstStyle/>
+          <a:p>
+            <a:pPr indent="0" marL="0">
+              <a:buNone/>
+            </a:pPr>
+            <a:r>
+              <a:rPr lang="en-US" sz="2000" b="1" dirty="0">
+                <a:solidFill>
+                  <a:srgbClr val="FFFFFF"/>
+                </a:solidFill>
+                <a:latin typeface="Calibri" pitchFamily="34" charset="0"/>
+                <a:ea typeface="Calibri" pitchFamily="34" charset="-122"/>
+                <a:cs typeface="Calibri" pitchFamily="34" charset="-120"/>
+              </a:rPr>
+              <a:t>Чек-лист готовности к уроку 23</a:t>
+            </a:r>
+            <a:endParaRPr lang="en-US" sz="2000" dirty="0"/>
+          </a:p>
+        </p:txBody>
+      </p:sp>
+      <p:sp>
+        <p:nvSpPr>
+          <p:cNvPr id="7" name="Text 4"/>
+          <p:cNvSpPr/>
+          <p:nvPr/>
+        </p:nvSpPr>
+        <p:spPr>
+          <a:xfrm>
+            <a:off x="1005840" y="2743200"/>
+            <a:ext cx="10058400" cy="2011680"/>
+          </a:xfrm>
+          <a:prstGeom prst="rect">
+            <a:avLst/>
+          </a:prstGeom>
+          <a:noFill/>
+          <a:ln/>
+        </p:spPr>
+        <p:txBody>
+          <a:bodyPr wrap="square" rtlCol="0" anchor="ctr"/>
+          <a:lstStyle/>
+          <a:p>
+            <a:pPr indent="0" marL="0">
+              <a:spcAft>
+                <a:spcPts val="1200"/>
+              </a:spcAft>
+              <a:buNone/>
+            </a:pPr>
+            <a:r>
               <a:rPr lang="en-US" sz="1700" dirty="0">
                 <a:solidFill>
                   <a:srgbClr val="D9D4F2"/>
@@ -3595,70 +4800,176 @@
                 <a:ea typeface="Calibri" pitchFamily="34" charset="-122"/>
                 <a:cs typeface="Calibri" pitchFamily="34" charset="-120"/>
               </a:rPr>
-              <a:t>Урок 24 — Demo Day: защита проекта перед родителями</a:t>
+              <a:t>☐  Модель улучшена и честно оценена (метрика vs baseline)</a:t>
             </a:r>
             <a:endParaRPr lang="en-US" sz="1700" dirty="0"/>
           </a:p>
-        </p:txBody>
-      </p:sp>
-      <p:sp>
-        <p:nvSpPr>
-          <p:cNvPr id="10" name="Text 8"/>
-          <p:cNvSpPr/>
-          <p:nvPr/>
-        </p:nvSpPr>
-        <p:spPr>
-          <a:xfrm>
-            <a:off x="6858000" y="5394960"/>
-            <a:ext cx="4572000" cy="457200"/>
-          </a:xfrm>
-          <a:prstGeom prst="rect">
-            <a:avLst/>
-          </a:prstGeom>
-          <a:noFill/>
-          <a:ln/>
-        </p:spPr>
-        <p:txBody>
-          <a:bodyPr wrap="square" rtlCol="0" anchor="t"/>
-          <a:lstStyle/>
           <a:p>
             <a:pPr indent="0" marL="0">
-              <a:buNone/>
-            </a:pPr>
-            <a:r>
-              <a:rPr lang="en-US" sz="1400" i="1" dirty="0">
-                <a:solidFill>
-                  <a:srgbClr val="9E96C8"/>
-                </a:solidFill>
-                <a:latin typeface="Calibri" pitchFamily="34" charset="0"/>
-                <a:ea typeface="Calibri" pitchFamily="34" charset="-122"/>
-                <a:cs typeface="Calibri" pitchFamily="34" charset="-120"/>
-              </a:rPr>
-              <a:t>Ты почти у финиша — впереди защита проекта!</a:t>
-            </a:r>
-            <a:endParaRPr lang="en-US" sz="1400" dirty="0"/>
-          </a:p>
-        </p:txBody>
-      </p:sp>
-      <p:sp>
-        <p:nvSpPr>
-          <p:cNvPr id="11" name="Text 9"/>
-          <p:cNvSpPr/>
-          <p:nvPr/>
-        </p:nvSpPr>
-        <p:spPr>
-          <a:xfrm>
-            <a:off x="10271455" y="6355080"/>
-            <a:ext cx="1371600" cy="274320"/>
-          </a:xfrm>
-          <a:prstGeom prst="rect">
-            <a:avLst/>
-          </a:prstGeom>
-          <a:noFill/>
-          <a:ln/>
-        </p:spPr>
-        <p:txBody>
-          <a:bodyPr wrap="square" rtlCol="0" anchor="t"/>
+              <a:spcAft>
+                <a:spcPts val="1200"/>
+              </a:spcAft>
+              <a:buNone/>
+            </a:pPr>
+            <a:r>
+              <a:rPr lang="en-US" sz="1700" dirty="0">
+                <a:solidFill>
+                  <a:srgbClr val="D9D4F2"/>
+                </a:solidFill>
+                <a:latin typeface="Calibri" pitchFamily="34" charset="0"/>
+                <a:ea typeface="Calibri" pitchFamily="34" charset="-122"/>
+                <a:cs typeface="Calibri" pitchFamily="34" charset="-120"/>
+              </a:rPr>
+              <a:t>☐  Работает веб-интерфейс (Gradio), проверен на новых данных</a:t>
+            </a:r>
+            <a:endParaRPr lang="en-US" sz="1700" dirty="0"/>
+          </a:p>
+          <a:p>
+            <a:pPr indent="0" marL="0">
+              <a:spcAft>
+                <a:spcPts val="1200"/>
+              </a:spcAft>
+              <a:buNone/>
+            </a:pPr>
+            <a:r>
+              <a:rPr lang="en-US" sz="1700" dirty="0">
+                <a:solidFill>
+                  <a:srgbClr val="D9D4F2"/>
+                </a:solidFill>
+                <a:latin typeface="Calibri" pitchFamily="34" charset="0"/>
+                <a:ea typeface="Calibri" pitchFamily="34" charset="-122"/>
+                <a:cs typeface="Calibri" pitchFamily="34" charset="-120"/>
+              </a:rPr>
+              <a:t>☐  Есть структура презентации (3–5 слайдов)</a:t>
+            </a:r>
+            <a:endParaRPr lang="en-US" sz="1700" dirty="0"/>
+          </a:p>
+          <a:p>
+            <a:pPr indent="0" marL="0">
+              <a:spcAft>
+                <a:spcPts val="1200"/>
+              </a:spcAft>
+              <a:buNone/>
+            </a:pPr>
+            <a:r>
+              <a:rPr lang="en-US" sz="1700" dirty="0">
+                <a:solidFill>
+                  <a:srgbClr val="D9D4F2"/>
+                </a:solidFill>
+                <a:latin typeface="Calibri" pitchFamily="34" charset="0"/>
+                <a:ea typeface="Calibri" pitchFamily="34" charset="-122"/>
+                <a:cs typeface="Calibri" pitchFamily="34" charset="-120"/>
+              </a:rPr>
+              <a:t>☐  Черновик README готов</a:t>
+            </a:r>
+            <a:endParaRPr lang="en-US" sz="1700" dirty="0"/>
+          </a:p>
+        </p:txBody>
+      </p:sp>
+      <p:sp>
+        <p:nvSpPr>
+          <p:cNvPr id="8" name="Shape 5"/>
+          <p:cNvSpPr/>
+          <p:nvPr/>
+        </p:nvSpPr>
+        <p:spPr>
+          <a:xfrm>
+            <a:off x="640080" y="5120640"/>
+            <a:ext cx="10881360" cy="868680"/>
+          </a:xfrm>
+          <a:prstGeom prst="roundRect">
+            <a:avLst>
+              <a:gd name="adj" fmla="val 12632"/>
+            </a:avLst>
+          </a:prstGeom>
+          <a:solidFill>
+            <a:srgbClr val="5B4FC4"/>
+          </a:solidFill>
+          <a:ln/>
+        </p:spPr>
+      </p:sp>
+      <p:pic>
+        <p:nvPicPr>
+          <p:cNvPr id="9" name="Image 1" descr="preencoded.png">    </p:cNvPr>
+          <p:cNvPicPr>
+            <a:picLocks noChangeAspect="1"/>
+          </p:cNvPicPr>
+          <p:nvPr/>
+        </p:nvPicPr>
+        <p:blipFill>
+          <a:blip r:embed="rId2"/>
+          <a:stretch>
+            <a:fillRect/>
+          </a:stretch>
+        </p:blipFill>
+        <p:spPr>
+          <a:xfrm>
+            <a:off x="914400" y="5321808"/>
+            <a:ext cx="457200" cy="457200"/>
+          </a:xfrm>
+          <a:prstGeom prst="rect">
+            <a:avLst/>
+          </a:prstGeom>
+        </p:spPr>
+      </p:pic>
+      <p:sp>
+        <p:nvSpPr>
+          <p:cNvPr id="10" name="Text 6"/>
+          <p:cNvSpPr/>
+          <p:nvPr/>
+        </p:nvSpPr>
+        <p:spPr>
+          <a:xfrm>
+            <a:off x="1554480" y="5120640"/>
+            <a:ext cx="9784080" cy="868680"/>
+          </a:xfrm>
+          <a:prstGeom prst="rect">
+            <a:avLst/>
+          </a:prstGeom>
+          <a:noFill/>
+          <a:ln/>
+        </p:spPr>
+        <p:txBody>
+          <a:bodyPr wrap="square" rtlCol="0" anchor="ctr"/>
+          <a:lstStyle/>
+          <a:p>
+            <a:pPr indent="0" marL="0">
+              <a:buNone/>
+            </a:pPr>
+            <a:r>
+              <a:rPr lang="en-US" sz="1600" b="1" dirty="0">
+                <a:solidFill>
+                  <a:srgbClr val="FFFFFF"/>
+                </a:solidFill>
+                <a:latin typeface="Calibri" pitchFamily="34" charset="0"/>
+                <a:ea typeface="Calibri" pitchFamily="34" charset="-122"/>
+                <a:cs typeface="Calibri" pitchFamily="34" charset="-120"/>
+              </a:rPr>
+              <a:t>Дальше: урок 23 — репетиция и деплой · урок 24 — Demo Day: защита проекта перед родителями.</a:t>
+            </a:r>
+            <a:endParaRPr lang="en-US" sz="1600" dirty="0"/>
+          </a:p>
+        </p:txBody>
+      </p:sp>
+      <p:sp>
+        <p:nvSpPr>
+          <p:cNvPr id="11" name="Text 7"/>
+          <p:cNvSpPr/>
+          <p:nvPr/>
+        </p:nvSpPr>
+        <p:spPr>
+          <a:xfrm>
+            <a:off x="10698480" y="6309360"/>
+            <a:ext cx="1188720" cy="274320"/>
+          </a:xfrm>
+          <a:prstGeom prst="rect">
+            <a:avLst/>
+          </a:prstGeom>
+          <a:noFill/>
+          <a:ln/>
+        </p:spPr>
+        <p:txBody>
+          <a:bodyPr wrap="square" rtlCol="0" anchor="ctr"/>
           <a:lstStyle/>
           <a:p>
             <a:pPr algn="r" indent="0" marL="0">
